--- a/嵌入式学习资料/STM32/大三下课堂课件/第六章 EXTI原理及应用.pptx
+++ b/嵌入式学习资料/STM32/大三下课堂课件/第六章 EXTI原理及应用.pptx
@@ -5357,7 +5357,7 @@
             <a:fld id="{6887AC20-8C1D-44D7-B35A-E6F76E68648C}" type="datetimeFigureOut">
               <a:rPr lang="zh-CN" altLang="en-US" smtClean="0"/>
               <a:pPr/>
-              <a:t>2026/5/28</a:t>
+              <a:t>2026/6/21</a:t>
             </a:fld>
             <a:endParaRPr lang="zh-CN" altLang="en-US"/>
           </a:p>
@@ -5663,7 +5663,7 @@
             <a:fld id="{82F288E0-7875-42C4-84C8-98DBBD3BF4D2}" type="datetimeFigureOut">
               <a:rPr lang="zh-CN" altLang="en-US" smtClean="0"/>
               <a:pPr/>
-              <a:t>2026/5/28</a:t>
+              <a:t>2026/6/21</a:t>
             </a:fld>
             <a:endParaRPr lang="zh-CN" altLang="en-US"/>
           </a:p>
@@ -5799,7 +5799,7 @@
             <a:fld id="{82F288E0-7875-42C4-84C8-98DBBD3BF4D2}" type="datetimeFigureOut">
               <a:rPr lang="zh-CN" altLang="en-US" smtClean="0"/>
               <a:pPr/>
-              <a:t>2026/5/28</a:t>
+              <a:t>2026/6/21</a:t>
             </a:fld>
             <a:endParaRPr lang="zh-CN" altLang="en-US"/>
           </a:p>
@@ -6048,7 +6048,7 @@
             <a:fld id="{82F288E0-7875-42C4-84C8-98DBBD3BF4D2}" type="datetimeFigureOut">
               <a:rPr lang="zh-CN" altLang="en-US" smtClean="0"/>
               <a:pPr/>
-              <a:t>2026/5/28</a:t>
+              <a:t>2026/6/21</a:t>
             </a:fld>
             <a:endParaRPr lang="zh-CN" altLang="en-US"/>
           </a:p>
@@ -6223,7 +6223,7 @@
             <a:fld id="{82F288E0-7875-42C4-84C8-98DBBD3BF4D2}" type="datetimeFigureOut">
               <a:rPr lang="zh-CN" altLang="en-US" smtClean="0"/>
               <a:pPr/>
-              <a:t>2026/5/28</a:t>
+              <a:t>2026/6/21</a:t>
             </a:fld>
             <a:endParaRPr lang="zh-CN" altLang="en-US"/>
           </a:p>
@@ -6371,7 +6371,7 @@
             <a:fld id="{82F288E0-7875-42C4-84C8-98DBBD3BF4D2}" type="datetimeFigureOut">
               <a:rPr lang="zh-CN" altLang="en-US" smtClean="0"/>
               <a:pPr/>
-              <a:t>2026/5/28</a:t>
+              <a:t>2026/6/21</a:t>
             </a:fld>
             <a:endParaRPr lang="zh-CN" altLang="en-US"/>
           </a:p>
@@ -6471,7 +6471,7 @@
             <a:fld id="{0E6A473D-8055-43E1-A01D-B0413067B7D8}" type="datetimeFigureOut">
               <a:rPr lang="zh-CN" altLang="en-US" smtClean="0"/>
               <a:pPr/>
-              <a:t>2026/5/28</a:t>
+              <a:t>2026/6/21</a:t>
             </a:fld>
             <a:endParaRPr lang="zh-CN" altLang="en-US"/>
           </a:p>
@@ -8297,7 +8297,7 @@
             <a:fld id="{DB75B134-9E54-4233-9AD4-A661A84126CB}" type="datetimeFigureOut">
               <a:rPr lang="zh-CN" altLang="en-US" smtClean="0"/>
               <a:pPr/>
-              <a:t>2026/5/28</a:t>
+              <a:t>2026/6/21</a:t>
             </a:fld>
             <a:endParaRPr lang="zh-CN" altLang="en-US"/>
           </a:p>
@@ -8397,7 +8397,7 @@
             <a:fld id="{82F288E0-7875-42C4-84C8-98DBBD3BF4D2}" type="datetimeFigureOut">
               <a:rPr lang="zh-CN" altLang="en-US" smtClean="0"/>
               <a:pPr/>
-              <a:t>2026/5/28</a:t>
+              <a:t>2026/6/21</a:t>
             </a:fld>
             <a:endParaRPr lang="zh-CN" altLang="en-US"/>
           </a:p>
@@ -8737,7 +8737,7 @@
             <a:fld id="{82F288E0-7875-42C4-84C8-98DBBD3BF4D2}" type="datetimeFigureOut">
               <a:rPr lang="zh-CN" altLang="en-US" smtClean="0"/>
               <a:pPr/>
-              <a:t>2026/5/28</a:t>
+              <a:t>2026/6/21</a:t>
             </a:fld>
             <a:endParaRPr lang="zh-CN" altLang="en-US"/>
           </a:p>
@@ -8924,7 +8924,7 @@
             <a:fld id="{82F288E0-7875-42C4-84C8-98DBBD3BF4D2}" type="datetimeFigureOut">
               <a:rPr lang="zh-CN" altLang="en-US" smtClean="0"/>
               <a:pPr/>
-              <a:t>2026/5/28</a:t>
+              <a:t>2026/6/21</a:t>
             </a:fld>
             <a:endParaRPr lang="zh-CN" altLang="en-US"/>
           </a:p>
@@ -9089,7 +9089,7 @@
             <a:fld id="{82F288E0-7875-42C4-84C8-98DBBD3BF4D2}" type="datetimeFigureOut">
               <a:rPr lang="zh-CN" altLang="en-US" smtClean="0"/>
               <a:pPr/>
-              <a:t>2026/5/28</a:t>
+              <a:t>2026/6/21</a:t>
             </a:fld>
             <a:endParaRPr lang="zh-CN" altLang="en-US"/>
           </a:p>
@@ -9331,7 +9331,7 @@
             <a:fld id="{82F288E0-7875-42C4-84C8-98DBBD3BF4D2}" type="datetimeFigureOut">
               <a:rPr lang="zh-CN" altLang="en-US" smtClean="0"/>
               <a:pPr/>
-              <a:t>2026/5/28</a:t>
+              <a:t>2026/6/21</a:t>
             </a:fld>
             <a:endParaRPr lang="zh-CN" altLang="en-US"/>
           </a:p>
@@ -9557,7 +9557,7 @@
             <a:fld id="{82F288E0-7875-42C4-84C8-98DBBD3BF4D2}" type="datetimeFigureOut">
               <a:rPr lang="zh-CN" altLang="en-US" smtClean="0"/>
               <a:pPr/>
-              <a:t>2026/5/28</a:t>
+              <a:t>2026/6/21</a:t>
             </a:fld>
             <a:endParaRPr lang="zh-CN" altLang="en-US"/>
           </a:p>
@@ -9918,7 +9918,7 @@
             <a:fld id="{82F288E0-7875-42C4-84C8-98DBBD3BF4D2}" type="datetimeFigureOut">
               <a:rPr lang="zh-CN" altLang="en-US" smtClean="0"/>
               <a:pPr/>
-              <a:t>2026/5/28</a:t>
+              <a:t>2026/6/21</a:t>
             </a:fld>
             <a:endParaRPr lang="zh-CN" altLang="en-US"/>
           </a:p>
@@ -10032,7 +10032,7 @@
             <a:fld id="{82F288E0-7875-42C4-84C8-98DBBD3BF4D2}" type="datetimeFigureOut">
               <a:rPr lang="zh-CN" altLang="en-US" smtClean="0"/>
               <a:pPr/>
-              <a:t>2026/5/28</a:t>
+              <a:t>2026/6/21</a:t>
             </a:fld>
             <a:endParaRPr lang="zh-CN" altLang="en-US"/>
           </a:p>
@@ -10240,7 +10240,7 @@
             <a:fld id="{82F288E0-7875-42C4-84C8-98DBBD3BF4D2}" type="datetimeFigureOut">
               <a:rPr lang="zh-CN" altLang="en-US" smtClean="0"/>
               <a:pPr/>
-              <a:t>2026/5/28</a:t>
+              <a:t>2026/6/21</a:t>
             </a:fld>
             <a:endParaRPr lang="zh-CN" altLang="en-US"/>
           </a:p>
@@ -10779,7 +10779,7 @@
             <a:fld id="{0E6A473D-8055-43E1-A01D-B0413067B7D8}" type="datetimeFigureOut">
               <a:rPr lang="zh-CN" altLang="en-US" smtClean="0"/>
               <a:pPr/>
-              <a:t>2026/5/28</a:t>
+              <a:t>2026/6/21</a:t>
             </a:fld>
             <a:endParaRPr lang="zh-CN" altLang="en-US"/>
           </a:p>
@@ -15402,8 +15402,8 @@
             <a:chExt cx="3970800" cy="1244160"/>
           </a:xfrm>
         </p:grpSpPr>
-        <mc:AlternateContent xmlns:mc="http://schemas.openxmlformats.org/markup-compatibility/2006">
-          <mc:Choice xmlns:p14="http://schemas.microsoft.com/office/powerpoint/2010/main" Requires="p14">
+        <mc:AlternateContent xmlns:mc="http://schemas.openxmlformats.org/markup-compatibility/2006" xmlns:p14="http://schemas.microsoft.com/office/powerpoint/2010/main">
+          <mc:Choice Requires="p14">
             <p:contentPart p14:bwMode="auto" r:id="rId3">
               <p14:nvContentPartPr>
                 <p14:cNvPr id="14" name="墨迹 13">
@@ -15422,7 +15422,7 @@
               </p14:xfrm>
             </p:contentPart>
           </mc:Choice>
-          <mc:Fallback>
+          <mc:Fallback xmlns="">
             <p:pic>
               <p:nvPicPr>
                 <p:cNvPr id="14" name="墨迹 13">
@@ -15453,8 +15453,8 @@
             </p:pic>
           </mc:Fallback>
         </mc:AlternateContent>
-        <mc:AlternateContent xmlns:mc="http://schemas.openxmlformats.org/markup-compatibility/2006">
-          <mc:Choice xmlns:p14="http://schemas.microsoft.com/office/powerpoint/2010/main" Requires="p14">
+        <mc:AlternateContent xmlns:mc="http://schemas.openxmlformats.org/markup-compatibility/2006" xmlns:p14="http://schemas.microsoft.com/office/powerpoint/2010/main">
+          <mc:Choice Requires="p14">
             <p:contentPart p14:bwMode="auto" r:id="rId5">
               <p14:nvContentPartPr>
                 <p14:cNvPr id="15" name="墨迹 14">
@@ -15473,7 +15473,7 @@
               </p14:xfrm>
             </p:contentPart>
           </mc:Choice>
-          <mc:Fallback>
+          <mc:Fallback xmlns="">
             <p:pic>
               <p:nvPicPr>
                 <p:cNvPr id="15" name="墨迹 14">
@@ -15504,8 +15504,8 @@
             </p:pic>
           </mc:Fallback>
         </mc:AlternateContent>
-        <mc:AlternateContent xmlns:mc="http://schemas.openxmlformats.org/markup-compatibility/2006">
-          <mc:Choice xmlns:p14="http://schemas.microsoft.com/office/powerpoint/2010/main" Requires="p14">
+        <mc:AlternateContent xmlns:mc="http://schemas.openxmlformats.org/markup-compatibility/2006" xmlns:p14="http://schemas.microsoft.com/office/powerpoint/2010/main">
+          <mc:Choice Requires="p14">
             <p:contentPart p14:bwMode="auto" r:id="rId7">
               <p14:nvContentPartPr>
                 <p14:cNvPr id="2" name="墨迹 1">
@@ -15524,7 +15524,7 @@
               </p14:xfrm>
             </p:contentPart>
           </mc:Choice>
-          <mc:Fallback>
+          <mc:Fallback xmlns="">
             <p:pic>
               <p:nvPicPr>
                 <p:cNvPr id="2" name="墨迹 1">
@@ -15555,8 +15555,8 @@
             </p:pic>
           </mc:Fallback>
         </mc:AlternateContent>
-        <mc:AlternateContent xmlns:mc="http://schemas.openxmlformats.org/markup-compatibility/2006">
-          <mc:Choice xmlns:p14="http://schemas.microsoft.com/office/powerpoint/2010/main" Requires="p14">
+        <mc:AlternateContent xmlns:mc="http://schemas.openxmlformats.org/markup-compatibility/2006" xmlns:p14="http://schemas.microsoft.com/office/powerpoint/2010/main">
+          <mc:Choice Requires="p14">
             <p:contentPart p14:bwMode="auto" r:id="rId9">
               <p14:nvContentPartPr>
                 <p14:cNvPr id="3" name="墨迹 2">
@@ -15575,7 +15575,7 @@
               </p14:xfrm>
             </p:contentPart>
           </mc:Choice>
-          <mc:Fallback>
+          <mc:Fallback xmlns="">
             <p:pic>
               <p:nvPicPr>
                 <p:cNvPr id="3" name="墨迹 2">
@@ -15606,8 +15606,8 @@
             </p:pic>
           </mc:Fallback>
         </mc:AlternateContent>
-        <mc:AlternateContent xmlns:mc="http://schemas.openxmlformats.org/markup-compatibility/2006">
-          <mc:Choice xmlns:p14="http://schemas.microsoft.com/office/powerpoint/2010/main" Requires="p14">
+        <mc:AlternateContent xmlns:mc="http://schemas.openxmlformats.org/markup-compatibility/2006" xmlns:p14="http://schemas.microsoft.com/office/powerpoint/2010/main">
+          <mc:Choice Requires="p14">
             <p:contentPart p14:bwMode="auto" r:id="rId11">
               <p14:nvContentPartPr>
                 <p14:cNvPr id="4" name="墨迹 3">
@@ -15626,7 +15626,7 @@
               </p14:xfrm>
             </p:contentPart>
           </mc:Choice>
-          <mc:Fallback>
+          <mc:Fallback xmlns="">
             <p:pic>
               <p:nvPicPr>
                 <p:cNvPr id="4" name="墨迹 3">
@@ -15657,8 +15657,8 @@
             </p:pic>
           </mc:Fallback>
         </mc:AlternateContent>
-        <mc:AlternateContent xmlns:mc="http://schemas.openxmlformats.org/markup-compatibility/2006">
-          <mc:Choice xmlns:p14="http://schemas.microsoft.com/office/powerpoint/2010/main" Requires="p14">
+        <mc:AlternateContent xmlns:mc="http://schemas.openxmlformats.org/markup-compatibility/2006" xmlns:p14="http://schemas.microsoft.com/office/powerpoint/2010/main">
+          <mc:Choice Requires="p14">
             <p:contentPart p14:bwMode="auto" r:id="rId13">
               <p14:nvContentPartPr>
                 <p14:cNvPr id="6" name="墨迹 5">
@@ -15677,7 +15677,7 @@
               </p14:xfrm>
             </p:contentPart>
           </mc:Choice>
-          <mc:Fallback>
+          <mc:Fallback xmlns="">
             <p:pic>
               <p:nvPicPr>
                 <p:cNvPr id="6" name="墨迹 5">
@@ -15708,8 +15708,8 @@
             </p:pic>
           </mc:Fallback>
         </mc:AlternateContent>
-        <mc:AlternateContent xmlns:mc="http://schemas.openxmlformats.org/markup-compatibility/2006">
-          <mc:Choice xmlns:p14="http://schemas.microsoft.com/office/powerpoint/2010/main" Requires="p14">
+        <mc:AlternateContent xmlns:mc="http://schemas.openxmlformats.org/markup-compatibility/2006" xmlns:p14="http://schemas.microsoft.com/office/powerpoint/2010/main">
+          <mc:Choice Requires="p14">
             <p:contentPart p14:bwMode="auto" r:id="rId15">
               <p14:nvContentPartPr>
                 <p14:cNvPr id="8" name="墨迹 7">
@@ -15728,7 +15728,7 @@
               </p14:xfrm>
             </p:contentPart>
           </mc:Choice>
-          <mc:Fallback>
+          <mc:Fallback xmlns="">
             <p:pic>
               <p:nvPicPr>
                 <p:cNvPr id="8" name="墨迹 7">
@@ -15759,8 +15759,8 @@
             </p:pic>
           </mc:Fallback>
         </mc:AlternateContent>
-        <mc:AlternateContent xmlns:mc="http://schemas.openxmlformats.org/markup-compatibility/2006">
-          <mc:Choice xmlns:p14="http://schemas.microsoft.com/office/powerpoint/2010/main" Requires="p14">
+        <mc:AlternateContent xmlns:mc="http://schemas.openxmlformats.org/markup-compatibility/2006" xmlns:p14="http://schemas.microsoft.com/office/powerpoint/2010/main">
+          <mc:Choice Requires="p14">
             <p:contentPart p14:bwMode="auto" r:id="rId17">
               <p14:nvContentPartPr>
                 <p14:cNvPr id="10" name="墨迹 9">
@@ -15779,7 +15779,7 @@
               </p14:xfrm>
             </p:contentPart>
           </mc:Choice>
-          <mc:Fallback>
+          <mc:Fallback xmlns="">
             <p:pic>
               <p:nvPicPr>
                 <p:cNvPr id="10" name="墨迹 9">
@@ -15810,8 +15810,8 @@
             </p:pic>
           </mc:Fallback>
         </mc:AlternateContent>
-        <mc:AlternateContent xmlns:mc="http://schemas.openxmlformats.org/markup-compatibility/2006">
-          <mc:Choice xmlns:p14="http://schemas.microsoft.com/office/powerpoint/2010/main" Requires="p14">
+        <mc:AlternateContent xmlns:mc="http://schemas.openxmlformats.org/markup-compatibility/2006" xmlns:p14="http://schemas.microsoft.com/office/powerpoint/2010/main">
+          <mc:Choice Requires="p14">
             <p:contentPart p14:bwMode="auto" r:id="rId19">
               <p14:nvContentPartPr>
                 <p14:cNvPr id="11" name="墨迹 10">
@@ -15830,7 +15830,7 @@
               </p14:xfrm>
             </p:contentPart>
           </mc:Choice>
-          <mc:Fallback>
+          <mc:Fallback xmlns="">
             <p:pic>
               <p:nvPicPr>
                 <p:cNvPr id="11" name="墨迹 10">
@@ -15861,8 +15861,8 @@
             </p:pic>
           </mc:Fallback>
         </mc:AlternateContent>
-        <mc:AlternateContent xmlns:mc="http://schemas.openxmlformats.org/markup-compatibility/2006">
-          <mc:Choice xmlns:p14="http://schemas.microsoft.com/office/powerpoint/2010/main" Requires="p14">
+        <mc:AlternateContent xmlns:mc="http://schemas.openxmlformats.org/markup-compatibility/2006" xmlns:p14="http://schemas.microsoft.com/office/powerpoint/2010/main">
+          <mc:Choice Requires="p14">
             <p:contentPart p14:bwMode="auto" r:id="rId21">
               <p14:nvContentPartPr>
                 <p14:cNvPr id="12" name="墨迹 11">
@@ -15881,7 +15881,7 @@
               </p14:xfrm>
             </p:contentPart>
           </mc:Choice>
-          <mc:Fallback>
+          <mc:Fallback xmlns="">
             <p:pic>
               <p:nvPicPr>
                 <p:cNvPr id="12" name="墨迹 11">
@@ -15912,8 +15912,8 @@
             </p:pic>
           </mc:Fallback>
         </mc:AlternateContent>
-        <mc:AlternateContent xmlns:mc="http://schemas.openxmlformats.org/markup-compatibility/2006">
-          <mc:Choice xmlns:p14="http://schemas.microsoft.com/office/powerpoint/2010/main" Requires="p14">
+        <mc:AlternateContent xmlns:mc="http://schemas.openxmlformats.org/markup-compatibility/2006" xmlns:p14="http://schemas.microsoft.com/office/powerpoint/2010/main">
+          <mc:Choice Requires="p14">
             <p:contentPart p14:bwMode="auto" r:id="rId23">
               <p14:nvContentPartPr>
                 <p14:cNvPr id="17" name="墨迹 16">
@@ -15932,7 +15932,7 @@
               </p14:xfrm>
             </p:contentPart>
           </mc:Choice>
-          <mc:Fallback>
+          <mc:Fallback xmlns="">
             <p:pic>
               <p:nvPicPr>
                 <p:cNvPr id="17" name="墨迹 16">
@@ -15963,8 +15963,8 @@
             </p:pic>
           </mc:Fallback>
         </mc:AlternateContent>
-        <mc:AlternateContent xmlns:mc="http://schemas.openxmlformats.org/markup-compatibility/2006">
-          <mc:Choice xmlns:p14="http://schemas.microsoft.com/office/powerpoint/2010/main" Requires="p14">
+        <mc:AlternateContent xmlns:mc="http://schemas.openxmlformats.org/markup-compatibility/2006" xmlns:p14="http://schemas.microsoft.com/office/powerpoint/2010/main">
+          <mc:Choice Requires="p14">
             <p:contentPart p14:bwMode="auto" r:id="rId25">
               <p14:nvContentPartPr>
                 <p14:cNvPr id="19" name="墨迹 18">
@@ -15983,7 +15983,7 @@
               </p14:xfrm>
             </p:contentPart>
           </mc:Choice>
-          <mc:Fallback>
+          <mc:Fallback xmlns="">
             <p:pic>
               <p:nvPicPr>
                 <p:cNvPr id="19" name="墨迹 18">
@@ -16014,8 +16014,8 @@
             </p:pic>
           </mc:Fallback>
         </mc:AlternateContent>
-        <mc:AlternateContent xmlns:mc="http://schemas.openxmlformats.org/markup-compatibility/2006">
-          <mc:Choice xmlns:p14="http://schemas.microsoft.com/office/powerpoint/2010/main" Requires="p14">
+        <mc:AlternateContent xmlns:mc="http://schemas.openxmlformats.org/markup-compatibility/2006" xmlns:p14="http://schemas.microsoft.com/office/powerpoint/2010/main">
+          <mc:Choice Requires="p14">
             <p:contentPart p14:bwMode="auto" r:id="rId27">
               <p14:nvContentPartPr>
                 <p14:cNvPr id="20" name="墨迹 19">
@@ -16034,7 +16034,7 @@
               </p14:xfrm>
             </p:contentPart>
           </mc:Choice>
-          <mc:Fallback>
+          <mc:Fallback xmlns="">
             <p:pic>
               <p:nvPicPr>
                 <p:cNvPr id="20" name="墨迹 19">
@@ -16065,8 +16065,8 @@
             </p:pic>
           </mc:Fallback>
         </mc:AlternateContent>
-        <mc:AlternateContent xmlns:mc="http://schemas.openxmlformats.org/markup-compatibility/2006">
-          <mc:Choice xmlns:p14="http://schemas.microsoft.com/office/powerpoint/2010/main" Requires="p14">
+        <mc:AlternateContent xmlns:mc="http://schemas.openxmlformats.org/markup-compatibility/2006" xmlns:p14="http://schemas.microsoft.com/office/powerpoint/2010/main">
+          <mc:Choice Requires="p14">
             <p:contentPart p14:bwMode="auto" r:id="rId29">
               <p14:nvContentPartPr>
                 <p14:cNvPr id="21" name="墨迹 20">
@@ -16085,7 +16085,7 @@
               </p14:xfrm>
             </p:contentPart>
           </mc:Choice>
-          <mc:Fallback>
+          <mc:Fallback xmlns="">
             <p:pic>
               <p:nvPicPr>
                 <p:cNvPr id="21" name="墨迹 20">
@@ -16116,8 +16116,8 @@
             </p:pic>
           </mc:Fallback>
         </mc:AlternateContent>
-        <mc:AlternateContent xmlns:mc="http://schemas.openxmlformats.org/markup-compatibility/2006">
-          <mc:Choice xmlns:p14="http://schemas.microsoft.com/office/powerpoint/2010/main" Requires="p14">
+        <mc:AlternateContent xmlns:mc="http://schemas.openxmlformats.org/markup-compatibility/2006" xmlns:p14="http://schemas.microsoft.com/office/powerpoint/2010/main">
+          <mc:Choice Requires="p14">
             <p:contentPart p14:bwMode="auto" r:id="rId31">
               <p14:nvContentPartPr>
                 <p14:cNvPr id="22" name="墨迹 21">
@@ -16136,7 +16136,7 @@
               </p14:xfrm>
             </p:contentPart>
           </mc:Choice>
-          <mc:Fallback>
+          <mc:Fallback xmlns="">
             <p:pic>
               <p:nvPicPr>
                 <p:cNvPr id="22" name="墨迹 21">
@@ -16167,8 +16167,8 @@
             </p:pic>
           </mc:Fallback>
         </mc:AlternateContent>
-        <mc:AlternateContent xmlns:mc="http://schemas.openxmlformats.org/markup-compatibility/2006">
-          <mc:Choice xmlns:p14="http://schemas.microsoft.com/office/powerpoint/2010/main" Requires="p14">
+        <mc:AlternateContent xmlns:mc="http://schemas.openxmlformats.org/markup-compatibility/2006" xmlns:p14="http://schemas.microsoft.com/office/powerpoint/2010/main">
+          <mc:Choice Requires="p14">
             <p:contentPart p14:bwMode="auto" r:id="rId33">
               <p14:nvContentPartPr>
                 <p14:cNvPr id="23" name="墨迹 22">
@@ -16187,7 +16187,7 @@
               </p14:xfrm>
             </p:contentPart>
           </mc:Choice>
-          <mc:Fallback>
+          <mc:Fallback xmlns="">
             <p:pic>
               <p:nvPicPr>
                 <p:cNvPr id="23" name="墨迹 22">
@@ -16218,8 +16218,8 @@
             </p:pic>
           </mc:Fallback>
         </mc:AlternateContent>
-        <mc:AlternateContent xmlns:mc="http://schemas.openxmlformats.org/markup-compatibility/2006">
-          <mc:Choice xmlns:p14="http://schemas.microsoft.com/office/powerpoint/2010/main" Requires="p14">
+        <mc:AlternateContent xmlns:mc="http://schemas.openxmlformats.org/markup-compatibility/2006" xmlns:p14="http://schemas.microsoft.com/office/powerpoint/2010/main">
+          <mc:Choice Requires="p14">
             <p:contentPart p14:bwMode="auto" r:id="rId35">
               <p14:nvContentPartPr>
                 <p14:cNvPr id="24" name="墨迹 23">
@@ -16238,7 +16238,7 @@
               </p14:xfrm>
             </p:contentPart>
           </mc:Choice>
-          <mc:Fallback>
+          <mc:Fallback xmlns="">
             <p:pic>
               <p:nvPicPr>
                 <p:cNvPr id="24" name="墨迹 23">
@@ -16269,8 +16269,8 @@
             </p:pic>
           </mc:Fallback>
         </mc:AlternateContent>
-        <mc:AlternateContent xmlns:mc="http://schemas.openxmlformats.org/markup-compatibility/2006">
-          <mc:Choice xmlns:p14="http://schemas.microsoft.com/office/powerpoint/2010/main" Requires="p14">
+        <mc:AlternateContent xmlns:mc="http://schemas.openxmlformats.org/markup-compatibility/2006" xmlns:p14="http://schemas.microsoft.com/office/powerpoint/2010/main">
+          <mc:Choice Requires="p14">
             <p:contentPart p14:bwMode="auto" r:id="rId37">
               <p14:nvContentPartPr>
                 <p14:cNvPr id="25" name="墨迹 24">
@@ -16289,7 +16289,7 @@
               </p14:xfrm>
             </p:contentPart>
           </mc:Choice>
-          <mc:Fallback>
+          <mc:Fallback xmlns="">
             <p:pic>
               <p:nvPicPr>
                 <p:cNvPr id="25" name="墨迹 24">
@@ -16320,8 +16320,8 @@
             </p:pic>
           </mc:Fallback>
         </mc:AlternateContent>
-        <mc:AlternateContent xmlns:mc="http://schemas.openxmlformats.org/markup-compatibility/2006">
-          <mc:Choice xmlns:p14="http://schemas.microsoft.com/office/powerpoint/2010/main" Requires="p14">
+        <mc:AlternateContent xmlns:mc="http://schemas.openxmlformats.org/markup-compatibility/2006" xmlns:p14="http://schemas.microsoft.com/office/powerpoint/2010/main">
+          <mc:Choice Requires="p14">
             <p:contentPart p14:bwMode="auto" r:id="rId39">
               <p14:nvContentPartPr>
                 <p14:cNvPr id="26" name="墨迹 25">
@@ -16340,7 +16340,7 @@
               </p14:xfrm>
             </p:contentPart>
           </mc:Choice>
-          <mc:Fallback>
+          <mc:Fallback xmlns="">
             <p:pic>
               <p:nvPicPr>
                 <p:cNvPr id="26" name="墨迹 25">
@@ -16371,8 +16371,8 @@
             </p:pic>
           </mc:Fallback>
         </mc:AlternateContent>
-        <mc:AlternateContent xmlns:mc="http://schemas.openxmlformats.org/markup-compatibility/2006">
-          <mc:Choice xmlns:p14="http://schemas.microsoft.com/office/powerpoint/2010/main" Requires="p14">
+        <mc:AlternateContent xmlns:mc="http://schemas.openxmlformats.org/markup-compatibility/2006" xmlns:p14="http://schemas.microsoft.com/office/powerpoint/2010/main">
+          <mc:Choice Requires="p14">
             <p:contentPart p14:bwMode="auto" r:id="rId41">
               <p14:nvContentPartPr>
                 <p14:cNvPr id="27" name="墨迹 26">
@@ -16391,7 +16391,7 @@
               </p14:xfrm>
             </p:contentPart>
           </mc:Choice>
-          <mc:Fallback>
+          <mc:Fallback xmlns="">
             <p:pic>
               <p:nvPicPr>
                 <p:cNvPr id="27" name="墨迹 26">
@@ -16443,8 +16443,8 @@
             <a:chExt cx="4830840" cy="472680"/>
           </a:xfrm>
         </p:grpSpPr>
-        <mc:AlternateContent xmlns:mc="http://schemas.openxmlformats.org/markup-compatibility/2006">
-          <mc:Choice xmlns:p14="http://schemas.microsoft.com/office/powerpoint/2010/main" Requires="p14">
+        <mc:AlternateContent xmlns:mc="http://schemas.openxmlformats.org/markup-compatibility/2006" xmlns:p14="http://schemas.microsoft.com/office/powerpoint/2010/main">
+          <mc:Choice Requires="p14">
             <p:contentPart p14:bwMode="auto" r:id="rId43">
               <p14:nvContentPartPr>
                 <p14:cNvPr id="29" name="墨迹 28">
@@ -16463,7 +16463,7 @@
               </p14:xfrm>
             </p:contentPart>
           </mc:Choice>
-          <mc:Fallback>
+          <mc:Fallback xmlns="">
             <p:pic>
               <p:nvPicPr>
                 <p:cNvPr id="29" name="墨迹 28">
@@ -16494,8 +16494,8 @@
             </p:pic>
           </mc:Fallback>
         </mc:AlternateContent>
-        <mc:AlternateContent xmlns:mc="http://schemas.openxmlformats.org/markup-compatibility/2006">
-          <mc:Choice xmlns:p14="http://schemas.microsoft.com/office/powerpoint/2010/main" Requires="p14">
+        <mc:AlternateContent xmlns:mc="http://schemas.openxmlformats.org/markup-compatibility/2006" xmlns:p14="http://schemas.microsoft.com/office/powerpoint/2010/main">
+          <mc:Choice Requires="p14">
             <p:contentPart p14:bwMode="auto" r:id="rId45">
               <p14:nvContentPartPr>
                 <p14:cNvPr id="30" name="墨迹 29">
@@ -16514,7 +16514,7 @@
               </p14:xfrm>
             </p:contentPart>
           </mc:Choice>
-          <mc:Fallback>
+          <mc:Fallback xmlns="">
             <p:pic>
               <p:nvPicPr>
                 <p:cNvPr id="30" name="墨迹 29">
@@ -16545,8 +16545,8 @@
             </p:pic>
           </mc:Fallback>
         </mc:AlternateContent>
-        <mc:AlternateContent xmlns:mc="http://schemas.openxmlformats.org/markup-compatibility/2006">
-          <mc:Choice xmlns:p14="http://schemas.microsoft.com/office/powerpoint/2010/main" Requires="p14">
+        <mc:AlternateContent xmlns:mc="http://schemas.openxmlformats.org/markup-compatibility/2006" xmlns:p14="http://schemas.microsoft.com/office/powerpoint/2010/main">
+          <mc:Choice Requires="p14">
             <p:contentPart p14:bwMode="auto" r:id="rId47">
               <p14:nvContentPartPr>
                 <p14:cNvPr id="31" name="墨迹 30">
@@ -16565,7 +16565,7 @@
               </p14:xfrm>
             </p:contentPart>
           </mc:Choice>
-          <mc:Fallback>
+          <mc:Fallback xmlns="">
             <p:pic>
               <p:nvPicPr>
                 <p:cNvPr id="31" name="墨迹 30">
@@ -16596,8 +16596,8 @@
             </p:pic>
           </mc:Fallback>
         </mc:AlternateContent>
-        <mc:AlternateContent xmlns:mc="http://schemas.openxmlformats.org/markup-compatibility/2006">
-          <mc:Choice xmlns:p14="http://schemas.microsoft.com/office/powerpoint/2010/main" Requires="p14">
+        <mc:AlternateContent xmlns:mc="http://schemas.openxmlformats.org/markup-compatibility/2006" xmlns:p14="http://schemas.microsoft.com/office/powerpoint/2010/main">
+          <mc:Choice Requires="p14">
             <p:contentPart p14:bwMode="auto" r:id="rId49">
               <p14:nvContentPartPr>
                 <p14:cNvPr id="32" name="墨迹 31">
@@ -16616,7 +16616,7 @@
               </p14:xfrm>
             </p:contentPart>
           </mc:Choice>
-          <mc:Fallback>
+          <mc:Fallback xmlns="">
             <p:pic>
               <p:nvPicPr>
                 <p:cNvPr id="32" name="墨迹 31">
@@ -16647,8 +16647,8 @@
             </p:pic>
           </mc:Fallback>
         </mc:AlternateContent>
-        <mc:AlternateContent xmlns:mc="http://schemas.openxmlformats.org/markup-compatibility/2006">
-          <mc:Choice xmlns:p14="http://schemas.microsoft.com/office/powerpoint/2010/main" Requires="p14">
+        <mc:AlternateContent xmlns:mc="http://schemas.openxmlformats.org/markup-compatibility/2006" xmlns:p14="http://schemas.microsoft.com/office/powerpoint/2010/main">
+          <mc:Choice Requires="p14">
             <p:contentPart p14:bwMode="auto" r:id="rId51">
               <p14:nvContentPartPr>
                 <p14:cNvPr id="33" name="墨迹 32">
@@ -16667,7 +16667,7 @@
               </p14:xfrm>
             </p:contentPart>
           </mc:Choice>
-          <mc:Fallback>
+          <mc:Fallback xmlns="">
             <p:pic>
               <p:nvPicPr>
                 <p:cNvPr id="33" name="墨迹 32">
@@ -16699,8 +16699,8 @@
           </mc:Fallback>
         </mc:AlternateContent>
       </p:grpSp>
-      <mc:AlternateContent xmlns:mc="http://schemas.openxmlformats.org/markup-compatibility/2006">
-        <mc:Choice xmlns:p14="http://schemas.microsoft.com/office/powerpoint/2010/main" Requires="p14">
+      <mc:AlternateContent xmlns:mc="http://schemas.openxmlformats.org/markup-compatibility/2006" xmlns:p14="http://schemas.microsoft.com/office/powerpoint/2010/main">
+        <mc:Choice Requires="p14">
           <p:contentPart p14:bwMode="auto" r:id="rId53">
             <p14:nvContentPartPr>
               <p14:cNvPr id="35" name="墨迹 34">
@@ -16719,7 +16719,7 @@
             </p14:xfrm>
           </p:contentPart>
         </mc:Choice>
-        <mc:Fallback>
+        <mc:Fallback xmlns="">
           <p:pic>
             <p:nvPicPr>
               <p:cNvPr id="35" name="墨迹 34">
@@ -16750,8 +16750,8 @@
           </p:pic>
         </mc:Fallback>
       </mc:AlternateContent>
-      <mc:AlternateContent xmlns:mc="http://schemas.openxmlformats.org/markup-compatibility/2006">
-        <mc:Choice xmlns:p14="http://schemas.microsoft.com/office/powerpoint/2010/main" Requires="p14">
+      <mc:AlternateContent xmlns:mc="http://schemas.openxmlformats.org/markup-compatibility/2006" xmlns:p14="http://schemas.microsoft.com/office/powerpoint/2010/main">
+        <mc:Choice Requires="p14">
           <p:contentPart p14:bwMode="auto" r:id="rId55">
             <p14:nvContentPartPr>
               <p14:cNvPr id="36" name="墨迹 35">
@@ -16770,7 +16770,7 @@
             </p14:xfrm>
           </p:contentPart>
         </mc:Choice>
-        <mc:Fallback>
+        <mc:Fallback xmlns="">
           <p:pic>
             <p:nvPicPr>
               <p:cNvPr id="36" name="墨迹 35">
@@ -26152,8 +26152,8 @@
           </a:p>
         </p:txBody>
       </p:sp>
-      <mc:AlternateContent xmlns:mc="http://schemas.openxmlformats.org/markup-compatibility/2006">
-        <mc:Choice xmlns:p14="http://schemas.microsoft.com/office/powerpoint/2010/main" Requires="p14">
+      <mc:AlternateContent xmlns:mc="http://schemas.openxmlformats.org/markup-compatibility/2006" xmlns:p14="http://schemas.microsoft.com/office/powerpoint/2010/main">
+        <mc:Choice Requires="p14">
           <p:contentPart p14:bwMode="auto" r:id="rId2">
             <p14:nvContentPartPr>
               <p14:cNvPr id="2" name="墨迹 1">
@@ -26172,7 +26172,7 @@
             </p14:xfrm>
           </p:contentPart>
         </mc:Choice>
-        <mc:Fallback>
+        <mc:Fallback xmlns="">
           <p:pic>
             <p:nvPicPr>
               <p:cNvPr id="2" name="墨迹 1">
@@ -26203,8 +26203,8 @@
           </p:pic>
         </mc:Fallback>
       </mc:AlternateContent>
-      <mc:AlternateContent xmlns:mc="http://schemas.openxmlformats.org/markup-compatibility/2006">
-        <mc:Choice xmlns:p14="http://schemas.microsoft.com/office/powerpoint/2010/main" Requires="p14">
+      <mc:AlternateContent xmlns:mc="http://schemas.openxmlformats.org/markup-compatibility/2006" xmlns:p14="http://schemas.microsoft.com/office/powerpoint/2010/main">
+        <mc:Choice Requires="p14">
           <p:contentPart p14:bwMode="auto" r:id="rId4">
             <p14:nvContentPartPr>
               <p14:cNvPr id="3" name="墨迹 2">
@@ -26223,7 +26223,7 @@
             </p14:xfrm>
           </p:contentPart>
         </mc:Choice>
-        <mc:Fallback>
+        <mc:Fallback xmlns="">
           <p:pic>
             <p:nvPicPr>
               <p:cNvPr id="3" name="墨迹 2">
@@ -26254,8 +26254,8 @@
           </p:pic>
         </mc:Fallback>
       </mc:AlternateContent>
-      <mc:AlternateContent xmlns:mc="http://schemas.openxmlformats.org/markup-compatibility/2006">
-        <mc:Choice xmlns:p14="http://schemas.microsoft.com/office/powerpoint/2010/main" Requires="p14">
+      <mc:AlternateContent xmlns:mc="http://schemas.openxmlformats.org/markup-compatibility/2006" xmlns:p14="http://schemas.microsoft.com/office/powerpoint/2010/main">
+        <mc:Choice Requires="p14">
           <p:contentPart p14:bwMode="auto" r:id="rId6">
             <p14:nvContentPartPr>
               <p14:cNvPr id="21" name="墨迹 20">
@@ -26274,7 +26274,7 @@
             </p14:xfrm>
           </p:contentPart>
         </mc:Choice>
-        <mc:Fallback>
+        <mc:Fallback xmlns="">
           <p:pic>
             <p:nvPicPr>
               <p:cNvPr id="21" name="墨迹 20">
@@ -26305,8 +26305,8 @@
           </p:pic>
         </mc:Fallback>
       </mc:AlternateContent>
-      <mc:AlternateContent xmlns:mc="http://schemas.openxmlformats.org/markup-compatibility/2006">
-        <mc:Choice xmlns:p14="http://schemas.microsoft.com/office/powerpoint/2010/main" Requires="p14">
+      <mc:AlternateContent xmlns:mc="http://schemas.openxmlformats.org/markup-compatibility/2006" xmlns:p14="http://schemas.microsoft.com/office/powerpoint/2010/main">
+        <mc:Choice Requires="p14">
           <p:contentPart p14:bwMode="auto" r:id="rId8">
             <p14:nvContentPartPr>
               <p14:cNvPr id="24" name="墨迹 23">
@@ -26325,7 +26325,7 @@
             </p14:xfrm>
           </p:contentPart>
         </mc:Choice>
-        <mc:Fallback>
+        <mc:Fallback xmlns="">
           <p:pic>
             <p:nvPicPr>
               <p:cNvPr id="24" name="墨迹 23">
@@ -26376,8 +26376,8 @@
             <a:chExt cx="2263320" cy="1207080"/>
           </a:xfrm>
         </p:grpSpPr>
-        <mc:AlternateContent xmlns:mc="http://schemas.openxmlformats.org/markup-compatibility/2006">
-          <mc:Choice xmlns:p14="http://schemas.microsoft.com/office/powerpoint/2010/main" Requires="p14">
+        <mc:AlternateContent xmlns:mc="http://schemas.openxmlformats.org/markup-compatibility/2006" xmlns:p14="http://schemas.microsoft.com/office/powerpoint/2010/main">
+          <mc:Choice Requires="p14">
             <p:contentPart p14:bwMode="auto" r:id="rId10">
               <p14:nvContentPartPr>
                 <p14:cNvPr id="4" name="墨迹 3">
@@ -26396,7 +26396,7 @@
               </p14:xfrm>
             </p:contentPart>
           </mc:Choice>
-          <mc:Fallback>
+          <mc:Fallback xmlns="">
             <p:pic>
               <p:nvPicPr>
                 <p:cNvPr id="4" name="墨迹 3">
@@ -26427,8 +26427,8 @@
             </p:pic>
           </mc:Fallback>
         </mc:AlternateContent>
-        <mc:AlternateContent xmlns:mc="http://schemas.openxmlformats.org/markup-compatibility/2006">
-          <mc:Choice xmlns:p14="http://schemas.microsoft.com/office/powerpoint/2010/main" Requires="p14">
+        <mc:AlternateContent xmlns:mc="http://schemas.openxmlformats.org/markup-compatibility/2006" xmlns:p14="http://schemas.microsoft.com/office/powerpoint/2010/main">
+          <mc:Choice Requires="p14">
             <p:contentPart p14:bwMode="auto" r:id="rId12">
               <p14:nvContentPartPr>
                 <p14:cNvPr id="5" name="墨迹 4">
@@ -26447,7 +26447,7 @@
               </p14:xfrm>
             </p:contentPart>
           </mc:Choice>
-          <mc:Fallback>
+          <mc:Fallback xmlns="">
             <p:pic>
               <p:nvPicPr>
                 <p:cNvPr id="5" name="墨迹 4">
@@ -26478,8 +26478,8 @@
             </p:pic>
           </mc:Fallback>
         </mc:AlternateContent>
-        <mc:AlternateContent xmlns:mc="http://schemas.openxmlformats.org/markup-compatibility/2006">
-          <mc:Choice xmlns:p14="http://schemas.microsoft.com/office/powerpoint/2010/main" Requires="p14">
+        <mc:AlternateContent xmlns:mc="http://schemas.openxmlformats.org/markup-compatibility/2006" xmlns:p14="http://schemas.microsoft.com/office/powerpoint/2010/main">
+          <mc:Choice Requires="p14">
             <p:contentPart p14:bwMode="auto" r:id="rId14">
               <p14:nvContentPartPr>
                 <p14:cNvPr id="7" name="墨迹 6">
@@ -26498,7 +26498,7 @@
               </p14:xfrm>
             </p:contentPart>
           </mc:Choice>
-          <mc:Fallback>
+          <mc:Fallback xmlns="">
             <p:pic>
               <p:nvPicPr>
                 <p:cNvPr id="7" name="墨迹 6">
@@ -26529,8 +26529,8 @@
             </p:pic>
           </mc:Fallback>
         </mc:AlternateContent>
-        <mc:AlternateContent xmlns:mc="http://schemas.openxmlformats.org/markup-compatibility/2006">
-          <mc:Choice xmlns:p14="http://schemas.microsoft.com/office/powerpoint/2010/main" Requires="p14">
+        <mc:AlternateContent xmlns:mc="http://schemas.openxmlformats.org/markup-compatibility/2006" xmlns:p14="http://schemas.microsoft.com/office/powerpoint/2010/main">
+          <mc:Choice Requires="p14">
             <p:contentPart p14:bwMode="auto" r:id="rId16">
               <p14:nvContentPartPr>
                 <p14:cNvPr id="8" name="墨迹 7">
@@ -26549,7 +26549,7 @@
               </p14:xfrm>
             </p:contentPart>
           </mc:Choice>
-          <mc:Fallback>
+          <mc:Fallback xmlns="">
             <p:pic>
               <p:nvPicPr>
                 <p:cNvPr id="8" name="墨迹 7">
@@ -26580,8 +26580,8 @@
             </p:pic>
           </mc:Fallback>
         </mc:AlternateContent>
-        <mc:AlternateContent xmlns:mc="http://schemas.openxmlformats.org/markup-compatibility/2006">
-          <mc:Choice xmlns:p14="http://schemas.microsoft.com/office/powerpoint/2010/main" Requires="p14">
+        <mc:AlternateContent xmlns:mc="http://schemas.openxmlformats.org/markup-compatibility/2006" xmlns:p14="http://schemas.microsoft.com/office/powerpoint/2010/main">
+          <mc:Choice Requires="p14">
             <p:contentPart p14:bwMode="auto" r:id="rId18">
               <p14:nvContentPartPr>
                 <p14:cNvPr id="9" name="墨迹 8">
@@ -26600,7 +26600,7 @@
               </p14:xfrm>
             </p:contentPart>
           </mc:Choice>
-          <mc:Fallback>
+          <mc:Fallback xmlns="">
             <p:pic>
               <p:nvPicPr>
                 <p:cNvPr id="9" name="墨迹 8">
@@ -26631,8 +26631,8 @@
             </p:pic>
           </mc:Fallback>
         </mc:AlternateContent>
-        <mc:AlternateContent xmlns:mc="http://schemas.openxmlformats.org/markup-compatibility/2006">
-          <mc:Choice xmlns:p14="http://schemas.microsoft.com/office/powerpoint/2010/main" Requires="p14">
+        <mc:AlternateContent xmlns:mc="http://schemas.openxmlformats.org/markup-compatibility/2006" xmlns:p14="http://schemas.microsoft.com/office/powerpoint/2010/main">
+          <mc:Choice Requires="p14">
             <p:contentPart p14:bwMode="auto" r:id="rId20">
               <p14:nvContentPartPr>
                 <p14:cNvPr id="10" name="墨迹 9">
@@ -26651,7 +26651,7 @@
               </p14:xfrm>
             </p:contentPart>
           </mc:Choice>
-          <mc:Fallback>
+          <mc:Fallback xmlns="">
             <p:pic>
               <p:nvPicPr>
                 <p:cNvPr id="10" name="墨迹 9">
@@ -26682,8 +26682,8 @@
             </p:pic>
           </mc:Fallback>
         </mc:AlternateContent>
-        <mc:AlternateContent xmlns:mc="http://schemas.openxmlformats.org/markup-compatibility/2006">
-          <mc:Choice xmlns:p14="http://schemas.microsoft.com/office/powerpoint/2010/main" Requires="p14">
+        <mc:AlternateContent xmlns:mc="http://schemas.openxmlformats.org/markup-compatibility/2006" xmlns:p14="http://schemas.microsoft.com/office/powerpoint/2010/main">
+          <mc:Choice Requires="p14">
             <p:contentPart p14:bwMode="auto" r:id="rId22">
               <p14:nvContentPartPr>
                 <p14:cNvPr id="11" name="墨迹 10">
@@ -26702,7 +26702,7 @@
               </p14:xfrm>
             </p:contentPart>
           </mc:Choice>
-          <mc:Fallback>
+          <mc:Fallback xmlns="">
             <p:pic>
               <p:nvPicPr>
                 <p:cNvPr id="11" name="墨迹 10">
@@ -26733,8 +26733,8 @@
             </p:pic>
           </mc:Fallback>
         </mc:AlternateContent>
-        <mc:AlternateContent xmlns:mc="http://schemas.openxmlformats.org/markup-compatibility/2006">
-          <mc:Choice xmlns:p14="http://schemas.microsoft.com/office/powerpoint/2010/main" Requires="p14">
+        <mc:AlternateContent xmlns:mc="http://schemas.openxmlformats.org/markup-compatibility/2006" xmlns:p14="http://schemas.microsoft.com/office/powerpoint/2010/main">
+          <mc:Choice Requires="p14">
             <p:contentPart p14:bwMode="auto" r:id="rId24">
               <p14:nvContentPartPr>
                 <p14:cNvPr id="12" name="墨迹 11">
@@ -26753,7 +26753,7 @@
               </p14:xfrm>
             </p:contentPart>
           </mc:Choice>
-          <mc:Fallback>
+          <mc:Fallback xmlns="">
             <p:pic>
               <p:nvPicPr>
                 <p:cNvPr id="12" name="墨迹 11">
@@ -26784,8 +26784,8 @@
             </p:pic>
           </mc:Fallback>
         </mc:AlternateContent>
-        <mc:AlternateContent xmlns:mc="http://schemas.openxmlformats.org/markup-compatibility/2006">
-          <mc:Choice xmlns:p14="http://schemas.microsoft.com/office/powerpoint/2010/main" Requires="p14">
+        <mc:AlternateContent xmlns:mc="http://schemas.openxmlformats.org/markup-compatibility/2006" xmlns:p14="http://schemas.microsoft.com/office/powerpoint/2010/main">
+          <mc:Choice Requires="p14">
             <p:contentPart p14:bwMode="auto" r:id="rId26">
               <p14:nvContentPartPr>
                 <p14:cNvPr id="13" name="墨迹 12">
@@ -26804,7 +26804,7 @@
               </p14:xfrm>
             </p:contentPart>
           </mc:Choice>
-          <mc:Fallback>
+          <mc:Fallback xmlns="">
             <p:pic>
               <p:nvPicPr>
                 <p:cNvPr id="13" name="墨迹 12">
@@ -26835,8 +26835,8 @@
             </p:pic>
           </mc:Fallback>
         </mc:AlternateContent>
-        <mc:AlternateContent xmlns:mc="http://schemas.openxmlformats.org/markup-compatibility/2006">
-          <mc:Choice xmlns:p14="http://schemas.microsoft.com/office/powerpoint/2010/main" Requires="p14">
+        <mc:AlternateContent xmlns:mc="http://schemas.openxmlformats.org/markup-compatibility/2006" xmlns:p14="http://schemas.microsoft.com/office/powerpoint/2010/main">
+          <mc:Choice Requires="p14">
             <p:contentPart p14:bwMode="auto" r:id="rId28">
               <p14:nvContentPartPr>
                 <p14:cNvPr id="14" name="墨迹 13">
@@ -26855,7 +26855,7 @@
               </p14:xfrm>
             </p:contentPart>
           </mc:Choice>
-          <mc:Fallback>
+          <mc:Fallback xmlns="">
             <p:pic>
               <p:nvPicPr>
                 <p:cNvPr id="14" name="墨迹 13">
@@ -26886,8 +26886,8 @@
             </p:pic>
           </mc:Fallback>
         </mc:AlternateContent>
-        <mc:AlternateContent xmlns:mc="http://schemas.openxmlformats.org/markup-compatibility/2006">
-          <mc:Choice xmlns:p14="http://schemas.microsoft.com/office/powerpoint/2010/main" Requires="p14">
+        <mc:AlternateContent xmlns:mc="http://schemas.openxmlformats.org/markup-compatibility/2006" xmlns:p14="http://schemas.microsoft.com/office/powerpoint/2010/main">
+          <mc:Choice Requires="p14">
             <p:contentPart p14:bwMode="auto" r:id="rId30">
               <p14:nvContentPartPr>
                 <p14:cNvPr id="15" name="墨迹 14">
@@ -26906,7 +26906,7 @@
               </p14:xfrm>
             </p:contentPart>
           </mc:Choice>
-          <mc:Fallback>
+          <mc:Fallback xmlns="">
             <p:pic>
               <p:nvPicPr>
                 <p:cNvPr id="15" name="墨迹 14">
@@ -26937,8 +26937,8 @@
             </p:pic>
           </mc:Fallback>
         </mc:AlternateContent>
-        <mc:AlternateContent xmlns:mc="http://schemas.openxmlformats.org/markup-compatibility/2006">
-          <mc:Choice xmlns:p14="http://schemas.microsoft.com/office/powerpoint/2010/main" Requires="p14">
+        <mc:AlternateContent xmlns:mc="http://schemas.openxmlformats.org/markup-compatibility/2006" xmlns:p14="http://schemas.microsoft.com/office/powerpoint/2010/main">
+          <mc:Choice Requires="p14">
             <p:contentPart p14:bwMode="auto" r:id="rId32">
               <p14:nvContentPartPr>
                 <p14:cNvPr id="16" name="墨迹 15">
@@ -26957,7 +26957,7 @@
               </p14:xfrm>
             </p:contentPart>
           </mc:Choice>
-          <mc:Fallback>
+          <mc:Fallback xmlns="">
             <p:pic>
               <p:nvPicPr>
                 <p:cNvPr id="16" name="墨迹 15">
@@ -26988,8 +26988,8 @@
             </p:pic>
           </mc:Fallback>
         </mc:AlternateContent>
-        <mc:AlternateContent xmlns:mc="http://schemas.openxmlformats.org/markup-compatibility/2006">
-          <mc:Choice xmlns:p14="http://schemas.microsoft.com/office/powerpoint/2010/main" Requires="p14">
+        <mc:AlternateContent xmlns:mc="http://schemas.openxmlformats.org/markup-compatibility/2006" xmlns:p14="http://schemas.microsoft.com/office/powerpoint/2010/main">
+          <mc:Choice Requires="p14">
             <p:contentPart p14:bwMode="auto" r:id="rId34">
               <p14:nvContentPartPr>
                 <p14:cNvPr id="17" name="墨迹 16">
@@ -27008,7 +27008,7 @@
               </p14:xfrm>
             </p:contentPart>
           </mc:Choice>
-          <mc:Fallback>
+          <mc:Fallback xmlns="">
             <p:pic>
               <p:nvPicPr>
                 <p:cNvPr id="17" name="墨迹 16">
@@ -27039,8 +27039,8 @@
             </p:pic>
           </mc:Fallback>
         </mc:AlternateContent>
-        <mc:AlternateContent xmlns:mc="http://schemas.openxmlformats.org/markup-compatibility/2006">
-          <mc:Choice xmlns:p14="http://schemas.microsoft.com/office/powerpoint/2010/main" Requires="p14">
+        <mc:AlternateContent xmlns:mc="http://schemas.openxmlformats.org/markup-compatibility/2006" xmlns:p14="http://schemas.microsoft.com/office/powerpoint/2010/main">
+          <mc:Choice Requires="p14">
             <p:contentPart p14:bwMode="auto" r:id="rId36">
               <p14:nvContentPartPr>
                 <p14:cNvPr id="18" name="墨迹 17">
@@ -27059,7 +27059,7 @@
               </p14:xfrm>
             </p:contentPart>
           </mc:Choice>
-          <mc:Fallback>
+          <mc:Fallback xmlns="">
             <p:pic>
               <p:nvPicPr>
                 <p:cNvPr id="18" name="墨迹 17">
@@ -27090,8 +27090,8 @@
             </p:pic>
           </mc:Fallback>
         </mc:AlternateContent>
-        <mc:AlternateContent xmlns:mc="http://schemas.openxmlformats.org/markup-compatibility/2006">
-          <mc:Choice xmlns:p14="http://schemas.microsoft.com/office/powerpoint/2010/main" Requires="p14">
+        <mc:AlternateContent xmlns:mc="http://schemas.openxmlformats.org/markup-compatibility/2006" xmlns:p14="http://schemas.microsoft.com/office/powerpoint/2010/main">
+          <mc:Choice Requires="p14">
             <p:contentPart p14:bwMode="auto" r:id="rId38">
               <p14:nvContentPartPr>
                 <p14:cNvPr id="19" name="墨迹 18">
@@ -27110,7 +27110,7 @@
               </p14:xfrm>
             </p:contentPart>
           </mc:Choice>
-          <mc:Fallback>
+          <mc:Fallback xmlns="">
             <p:pic>
               <p:nvPicPr>
                 <p:cNvPr id="19" name="墨迹 18">
@@ -27141,8 +27141,8 @@
             </p:pic>
           </mc:Fallback>
         </mc:AlternateContent>
-        <mc:AlternateContent xmlns:mc="http://schemas.openxmlformats.org/markup-compatibility/2006">
-          <mc:Choice xmlns:p14="http://schemas.microsoft.com/office/powerpoint/2010/main" Requires="p14">
+        <mc:AlternateContent xmlns:mc="http://schemas.openxmlformats.org/markup-compatibility/2006" xmlns:p14="http://schemas.microsoft.com/office/powerpoint/2010/main">
+          <mc:Choice Requires="p14">
             <p:contentPart p14:bwMode="auto" r:id="rId40">
               <p14:nvContentPartPr>
                 <p14:cNvPr id="20" name="墨迹 19">
@@ -27161,7 +27161,7 @@
               </p14:xfrm>
             </p:contentPart>
           </mc:Choice>
-          <mc:Fallback>
+          <mc:Fallback xmlns="">
             <p:pic>
               <p:nvPicPr>
                 <p:cNvPr id="20" name="墨迹 19">
@@ -27192,8 +27192,8 @@
             </p:pic>
           </mc:Fallback>
         </mc:AlternateContent>
-        <mc:AlternateContent xmlns:mc="http://schemas.openxmlformats.org/markup-compatibility/2006">
-          <mc:Choice xmlns:p14="http://schemas.microsoft.com/office/powerpoint/2010/main" Requires="p14">
+        <mc:AlternateContent xmlns:mc="http://schemas.openxmlformats.org/markup-compatibility/2006" xmlns:p14="http://schemas.microsoft.com/office/powerpoint/2010/main">
+          <mc:Choice Requires="p14">
             <p:contentPart p14:bwMode="auto" r:id="rId42">
               <p14:nvContentPartPr>
                 <p14:cNvPr id="22" name="墨迹 21">
@@ -27212,7 +27212,7 @@
               </p14:xfrm>
             </p:contentPart>
           </mc:Choice>
-          <mc:Fallback>
+          <mc:Fallback xmlns="">
             <p:pic>
               <p:nvPicPr>
                 <p:cNvPr id="22" name="墨迹 21">
@@ -27243,8 +27243,8 @@
             </p:pic>
           </mc:Fallback>
         </mc:AlternateContent>
-        <mc:AlternateContent xmlns:mc="http://schemas.openxmlformats.org/markup-compatibility/2006">
-          <mc:Choice xmlns:p14="http://schemas.microsoft.com/office/powerpoint/2010/main" Requires="p14">
+        <mc:AlternateContent xmlns:mc="http://schemas.openxmlformats.org/markup-compatibility/2006" xmlns:p14="http://schemas.microsoft.com/office/powerpoint/2010/main">
+          <mc:Choice Requires="p14">
             <p:contentPart p14:bwMode="auto" r:id="rId44">
               <p14:nvContentPartPr>
                 <p14:cNvPr id="25" name="墨迹 24">
@@ -27263,7 +27263,7 @@
               </p14:xfrm>
             </p:contentPart>
           </mc:Choice>
-          <mc:Fallback>
+          <mc:Fallback xmlns="">
             <p:pic>
               <p:nvPicPr>
                 <p:cNvPr id="25" name="墨迹 24">
@@ -27295,8 +27295,8 @@
           </mc:Fallback>
         </mc:AlternateContent>
       </p:grpSp>
-      <mc:AlternateContent xmlns:mc="http://schemas.openxmlformats.org/markup-compatibility/2006">
-        <mc:Choice xmlns:p14="http://schemas.microsoft.com/office/powerpoint/2010/main" Requires="p14">
+      <mc:AlternateContent xmlns:mc="http://schemas.openxmlformats.org/markup-compatibility/2006" xmlns:p14="http://schemas.microsoft.com/office/powerpoint/2010/main">
+        <mc:Choice Requires="p14">
           <p:contentPart p14:bwMode="auto" r:id="rId46">
             <p14:nvContentPartPr>
               <p14:cNvPr id="27" name="墨迹 26">
@@ -27315,7 +27315,7 @@
             </p14:xfrm>
           </p:contentPart>
         </mc:Choice>
-        <mc:Fallback>
+        <mc:Fallback xmlns="">
           <p:pic>
             <p:nvPicPr>
               <p:cNvPr id="27" name="墨迹 26">
@@ -27346,8 +27346,8 @@
           </p:pic>
         </mc:Fallback>
       </mc:AlternateContent>
-      <mc:AlternateContent xmlns:mc="http://schemas.openxmlformats.org/markup-compatibility/2006">
-        <mc:Choice xmlns:p14="http://schemas.microsoft.com/office/powerpoint/2010/main" Requires="p14">
+      <mc:AlternateContent xmlns:mc="http://schemas.openxmlformats.org/markup-compatibility/2006" xmlns:p14="http://schemas.microsoft.com/office/powerpoint/2010/main">
+        <mc:Choice Requires="p14">
           <p:contentPart p14:bwMode="auto" r:id="rId48">
             <p14:nvContentPartPr>
               <p14:cNvPr id="28" name="墨迹 27">
@@ -27366,7 +27366,7 @@
             </p14:xfrm>
           </p:contentPart>
         </mc:Choice>
-        <mc:Fallback>
+        <mc:Fallback xmlns="">
           <p:pic>
             <p:nvPicPr>
               <p:cNvPr id="28" name="墨迹 27">
@@ -27907,8 +27907,8 @@
           <a:noFill/>
         </p:spPr>
       </p:pic>
-      <mc:AlternateContent xmlns:mc="http://schemas.openxmlformats.org/markup-compatibility/2006">
-        <mc:Choice xmlns:p14="http://schemas.microsoft.com/office/powerpoint/2010/main" Requires="p14">
+      <mc:AlternateContent xmlns:mc="http://schemas.openxmlformats.org/markup-compatibility/2006" xmlns:p14="http://schemas.microsoft.com/office/powerpoint/2010/main">
+        <mc:Choice Requires="p14">
           <p:contentPart p14:bwMode="auto" r:id="rId3">
             <p14:nvContentPartPr>
               <p14:cNvPr id="9" name="墨迹 8">
@@ -27927,7 +27927,7 @@
             </p14:xfrm>
           </p:contentPart>
         </mc:Choice>
-        <mc:Fallback>
+        <mc:Fallback xmlns="">
           <p:pic>
             <p:nvPicPr>
               <p:cNvPr id="9" name="墨迹 8">
@@ -27958,8 +27958,8 @@
           </p:pic>
         </mc:Fallback>
       </mc:AlternateContent>
-      <mc:AlternateContent xmlns:mc="http://schemas.openxmlformats.org/markup-compatibility/2006">
-        <mc:Choice xmlns:p14="http://schemas.microsoft.com/office/powerpoint/2010/main" Requires="p14">
+      <mc:AlternateContent xmlns:mc="http://schemas.openxmlformats.org/markup-compatibility/2006" xmlns:p14="http://schemas.microsoft.com/office/powerpoint/2010/main">
+        <mc:Choice Requires="p14">
           <p:contentPart p14:bwMode="auto" r:id="rId5">
             <p14:nvContentPartPr>
               <p14:cNvPr id="10" name="墨迹 9">
@@ -27978,7 +27978,7 @@
             </p14:xfrm>
           </p:contentPart>
         </mc:Choice>
-        <mc:Fallback>
+        <mc:Fallback xmlns="">
           <p:pic>
             <p:nvPicPr>
               <p:cNvPr id="10" name="墨迹 9">
@@ -28009,8 +28009,8 @@
           </p:pic>
         </mc:Fallback>
       </mc:AlternateContent>
-      <mc:AlternateContent xmlns:mc="http://schemas.openxmlformats.org/markup-compatibility/2006">
-        <mc:Choice xmlns:p14="http://schemas.microsoft.com/office/powerpoint/2010/main" Requires="p14">
+      <mc:AlternateContent xmlns:mc="http://schemas.openxmlformats.org/markup-compatibility/2006" xmlns:p14="http://schemas.microsoft.com/office/powerpoint/2010/main">
+        <mc:Choice Requires="p14">
           <p:contentPart p14:bwMode="auto" r:id="rId7">
             <p14:nvContentPartPr>
               <p14:cNvPr id="12" name="墨迹 11">
@@ -28029,7 +28029,7 @@
             </p14:xfrm>
           </p:contentPart>
         </mc:Choice>
-        <mc:Fallback>
+        <mc:Fallback xmlns="">
           <p:pic>
             <p:nvPicPr>
               <p:cNvPr id="12" name="墨迹 11">
@@ -28060,8 +28060,8 @@
           </p:pic>
         </mc:Fallback>
       </mc:AlternateContent>
-      <mc:AlternateContent xmlns:mc="http://schemas.openxmlformats.org/markup-compatibility/2006">
-        <mc:Choice xmlns:p14="http://schemas.microsoft.com/office/powerpoint/2010/main" Requires="p14">
+      <mc:AlternateContent xmlns:mc="http://schemas.openxmlformats.org/markup-compatibility/2006" xmlns:p14="http://schemas.microsoft.com/office/powerpoint/2010/main">
+        <mc:Choice Requires="p14">
           <p:contentPart p14:bwMode="auto" r:id="rId9">
             <p14:nvContentPartPr>
               <p14:cNvPr id="13" name="墨迹 12">
@@ -28080,7 +28080,7 @@
             </p14:xfrm>
           </p:contentPart>
         </mc:Choice>
-        <mc:Fallback>
+        <mc:Fallback xmlns="">
           <p:pic>
             <p:nvPicPr>
               <p:cNvPr id="13" name="墨迹 12">
@@ -28131,8 +28131,8 @@
             <a:chExt cx="1217880" cy="651960"/>
           </a:xfrm>
         </p:grpSpPr>
-        <mc:AlternateContent xmlns:mc="http://schemas.openxmlformats.org/markup-compatibility/2006">
-          <mc:Choice xmlns:p14="http://schemas.microsoft.com/office/powerpoint/2010/main" Requires="p14">
+        <mc:AlternateContent xmlns:mc="http://schemas.openxmlformats.org/markup-compatibility/2006" xmlns:p14="http://schemas.microsoft.com/office/powerpoint/2010/main">
+          <mc:Choice Requires="p14">
             <p:contentPart p14:bwMode="auto" r:id="rId11">
               <p14:nvContentPartPr>
                 <p14:cNvPr id="14" name="墨迹 13">
@@ -28151,7 +28151,7 @@
               </p14:xfrm>
             </p:contentPart>
           </mc:Choice>
-          <mc:Fallback>
+          <mc:Fallback xmlns="">
             <p:pic>
               <p:nvPicPr>
                 <p:cNvPr id="14" name="墨迹 13">
@@ -28182,8 +28182,8 @@
             </p:pic>
           </mc:Fallback>
         </mc:AlternateContent>
-        <mc:AlternateContent xmlns:mc="http://schemas.openxmlformats.org/markup-compatibility/2006">
-          <mc:Choice xmlns:p14="http://schemas.microsoft.com/office/powerpoint/2010/main" Requires="p14">
+        <mc:AlternateContent xmlns:mc="http://schemas.openxmlformats.org/markup-compatibility/2006" xmlns:p14="http://schemas.microsoft.com/office/powerpoint/2010/main">
+          <mc:Choice Requires="p14">
             <p:contentPart p14:bwMode="auto" r:id="rId13">
               <p14:nvContentPartPr>
                 <p14:cNvPr id="15" name="墨迹 14">
@@ -28202,7 +28202,7 @@
               </p14:xfrm>
             </p:contentPart>
           </mc:Choice>
-          <mc:Fallback>
+          <mc:Fallback xmlns="">
             <p:pic>
               <p:nvPicPr>
                 <p:cNvPr id="15" name="墨迹 14">
@@ -28233,8 +28233,8 @@
             </p:pic>
           </mc:Fallback>
         </mc:AlternateContent>
-        <mc:AlternateContent xmlns:mc="http://schemas.openxmlformats.org/markup-compatibility/2006">
-          <mc:Choice xmlns:p14="http://schemas.microsoft.com/office/powerpoint/2010/main" Requires="p14">
+        <mc:AlternateContent xmlns:mc="http://schemas.openxmlformats.org/markup-compatibility/2006" xmlns:p14="http://schemas.microsoft.com/office/powerpoint/2010/main">
+          <mc:Choice Requires="p14">
             <p:contentPart p14:bwMode="auto" r:id="rId15">
               <p14:nvContentPartPr>
                 <p14:cNvPr id="16" name="墨迹 15">
@@ -28253,7 +28253,7 @@
               </p14:xfrm>
             </p:contentPart>
           </mc:Choice>
-          <mc:Fallback>
+          <mc:Fallback xmlns="">
             <p:pic>
               <p:nvPicPr>
                 <p:cNvPr id="16" name="墨迹 15">
@@ -28284,8 +28284,8 @@
             </p:pic>
           </mc:Fallback>
         </mc:AlternateContent>
-        <mc:AlternateContent xmlns:mc="http://schemas.openxmlformats.org/markup-compatibility/2006">
-          <mc:Choice xmlns:p14="http://schemas.microsoft.com/office/powerpoint/2010/main" Requires="p14">
+        <mc:AlternateContent xmlns:mc="http://schemas.openxmlformats.org/markup-compatibility/2006" xmlns:p14="http://schemas.microsoft.com/office/powerpoint/2010/main">
+          <mc:Choice Requires="p14">
             <p:contentPart p14:bwMode="auto" r:id="rId17">
               <p14:nvContentPartPr>
                 <p14:cNvPr id="17" name="墨迹 16">
@@ -28304,7 +28304,7 @@
               </p14:xfrm>
             </p:contentPart>
           </mc:Choice>
-          <mc:Fallback>
+          <mc:Fallback xmlns="">
             <p:pic>
               <p:nvPicPr>
                 <p:cNvPr id="17" name="墨迹 16">
@@ -28335,8 +28335,8 @@
             </p:pic>
           </mc:Fallback>
         </mc:AlternateContent>
-        <mc:AlternateContent xmlns:mc="http://schemas.openxmlformats.org/markup-compatibility/2006">
-          <mc:Choice xmlns:p14="http://schemas.microsoft.com/office/powerpoint/2010/main" Requires="p14">
+        <mc:AlternateContent xmlns:mc="http://schemas.openxmlformats.org/markup-compatibility/2006" xmlns:p14="http://schemas.microsoft.com/office/powerpoint/2010/main">
+          <mc:Choice Requires="p14">
             <p:contentPart p14:bwMode="auto" r:id="rId19">
               <p14:nvContentPartPr>
                 <p14:cNvPr id="18" name="墨迹 17">
@@ -28355,7 +28355,7 @@
               </p14:xfrm>
             </p:contentPart>
           </mc:Choice>
-          <mc:Fallback>
+          <mc:Fallback xmlns="">
             <p:pic>
               <p:nvPicPr>
                 <p:cNvPr id="18" name="墨迹 17">
@@ -28543,8 +28543,8 @@
             <a:chExt cx="1010160" cy="505800"/>
           </a:xfrm>
         </p:grpSpPr>
-        <mc:AlternateContent xmlns:mc="http://schemas.openxmlformats.org/markup-compatibility/2006">
-          <mc:Choice xmlns:p14="http://schemas.microsoft.com/office/powerpoint/2010/main" Requires="p14">
+        <mc:AlternateContent xmlns:mc="http://schemas.openxmlformats.org/markup-compatibility/2006" xmlns:p14="http://schemas.microsoft.com/office/powerpoint/2010/main">
+          <mc:Choice Requires="p14">
             <p:contentPart p14:bwMode="auto" r:id="rId2">
               <p14:nvContentPartPr>
                 <p14:cNvPr id="3" name="墨迹 2">
@@ -28563,7 +28563,7 @@
               </p14:xfrm>
             </p:contentPart>
           </mc:Choice>
-          <mc:Fallback>
+          <mc:Fallback xmlns="">
             <p:pic>
               <p:nvPicPr>
                 <p:cNvPr id="3" name="墨迹 2">
@@ -28594,8 +28594,8 @@
             </p:pic>
           </mc:Fallback>
         </mc:AlternateContent>
-        <mc:AlternateContent xmlns:mc="http://schemas.openxmlformats.org/markup-compatibility/2006">
-          <mc:Choice xmlns:p14="http://schemas.microsoft.com/office/powerpoint/2010/main" Requires="p14">
+        <mc:AlternateContent xmlns:mc="http://schemas.openxmlformats.org/markup-compatibility/2006" xmlns:p14="http://schemas.microsoft.com/office/powerpoint/2010/main">
+          <mc:Choice Requires="p14">
             <p:contentPart p14:bwMode="auto" r:id="rId4">
               <p14:nvContentPartPr>
                 <p14:cNvPr id="4" name="墨迹 3">
@@ -28614,7 +28614,7 @@
               </p14:xfrm>
             </p:contentPart>
           </mc:Choice>
-          <mc:Fallback>
+          <mc:Fallback xmlns="">
             <p:pic>
               <p:nvPicPr>
                 <p:cNvPr id="4" name="墨迹 3">
@@ -28645,8 +28645,8 @@
             </p:pic>
           </mc:Fallback>
         </mc:AlternateContent>
-        <mc:AlternateContent xmlns:mc="http://schemas.openxmlformats.org/markup-compatibility/2006">
-          <mc:Choice xmlns:p14="http://schemas.microsoft.com/office/powerpoint/2010/main" Requires="p14">
+        <mc:AlternateContent xmlns:mc="http://schemas.openxmlformats.org/markup-compatibility/2006" xmlns:p14="http://schemas.microsoft.com/office/powerpoint/2010/main">
+          <mc:Choice Requires="p14">
             <p:contentPart p14:bwMode="auto" r:id="rId6">
               <p14:nvContentPartPr>
                 <p14:cNvPr id="5" name="墨迹 4">
@@ -28665,7 +28665,7 @@
               </p14:xfrm>
             </p:contentPart>
           </mc:Choice>
-          <mc:Fallback>
+          <mc:Fallback xmlns="">
             <p:pic>
               <p:nvPicPr>
                 <p:cNvPr id="5" name="墨迹 4">
@@ -28696,8 +28696,8 @@
             </p:pic>
           </mc:Fallback>
         </mc:AlternateContent>
-        <mc:AlternateContent xmlns:mc="http://schemas.openxmlformats.org/markup-compatibility/2006">
-          <mc:Choice xmlns:p14="http://schemas.microsoft.com/office/powerpoint/2010/main" Requires="p14">
+        <mc:AlternateContent xmlns:mc="http://schemas.openxmlformats.org/markup-compatibility/2006" xmlns:p14="http://schemas.microsoft.com/office/powerpoint/2010/main">
+          <mc:Choice Requires="p14">
             <p:contentPart p14:bwMode="auto" r:id="rId8">
               <p14:nvContentPartPr>
                 <p14:cNvPr id="6" name="墨迹 5">
@@ -28716,7 +28716,7 @@
               </p14:xfrm>
             </p:contentPart>
           </mc:Choice>
-          <mc:Fallback>
+          <mc:Fallback xmlns="">
             <p:pic>
               <p:nvPicPr>
                 <p:cNvPr id="6" name="墨迹 5">
@@ -28747,8 +28747,8 @@
             </p:pic>
           </mc:Fallback>
         </mc:AlternateContent>
-        <mc:AlternateContent xmlns:mc="http://schemas.openxmlformats.org/markup-compatibility/2006">
-          <mc:Choice xmlns:p14="http://schemas.microsoft.com/office/powerpoint/2010/main" Requires="p14">
+        <mc:AlternateContent xmlns:mc="http://schemas.openxmlformats.org/markup-compatibility/2006" xmlns:p14="http://schemas.microsoft.com/office/powerpoint/2010/main">
+          <mc:Choice Requires="p14">
             <p:contentPart p14:bwMode="auto" r:id="rId10">
               <p14:nvContentPartPr>
                 <p14:cNvPr id="7" name="墨迹 6">
@@ -28767,7 +28767,7 @@
               </p14:xfrm>
             </p:contentPart>
           </mc:Choice>
-          <mc:Fallback>
+          <mc:Fallback xmlns="">
             <p:pic>
               <p:nvPicPr>
                 <p:cNvPr id="7" name="墨迹 6">
@@ -28798,8 +28798,8 @@
             </p:pic>
           </mc:Fallback>
         </mc:AlternateContent>
-        <mc:AlternateContent xmlns:mc="http://schemas.openxmlformats.org/markup-compatibility/2006">
-          <mc:Choice xmlns:p14="http://schemas.microsoft.com/office/powerpoint/2010/main" Requires="p14">
+        <mc:AlternateContent xmlns:mc="http://schemas.openxmlformats.org/markup-compatibility/2006" xmlns:p14="http://schemas.microsoft.com/office/powerpoint/2010/main">
+          <mc:Choice Requires="p14">
             <p:contentPart p14:bwMode="auto" r:id="rId12">
               <p14:nvContentPartPr>
                 <p14:cNvPr id="8" name="墨迹 7">
@@ -28818,7 +28818,7 @@
               </p14:xfrm>
             </p:contentPart>
           </mc:Choice>
-          <mc:Fallback>
+          <mc:Fallback xmlns="">
             <p:pic>
               <p:nvPicPr>
                 <p:cNvPr id="8" name="墨迹 7">
@@ -28849,8 +28849,8 @@
             </p:pic>
           </mc:Fallback>
         </mc:AlternateContent>
-        <mc:AlternateContent xmlns:mc="http://schemas.openxmlformats.org/markup-compatibility/2006">
-          <mc:Choice xmlns:p14="http://schemas.microsoft.com/office/powerpoint/2010/main" Requires="p14">
+        <mc:AlternateContent xmlns:mc="http://schemas.openxmlformats.org/markup-compatibility/2006" xmlns:p14="http://schemas.microsoft.com/office/powerpoint/2010/main">
+          <mc:Choice Requires="p14">
             <p:contentPart p14:bwMode="auto" r:id="rId14">
               <p14:nvContentPartPr>
                 <p14:cNvPr id="9" name="墨迹 8">
@@ -28869,7 +28869,7 @@
               </p14:xfrm>
             </p:contentPart>
           </mc:Choice>
-          <mc:Fallback>
+          <mc:Fallback xmlns="">
             <p:pic>
               <p:nvPicPr>
                 <p:cNvPr id="9" name="墨迹 8">
@@ -28901,8 +28901,8 @@
           </mc:Fallback>
         </mc:AlternateContent>
       </p:grpSp>
-      <mc:AlternateContent xmlns:mc="http://schemas.openxmlformats.org/markup-compatibility/2006">
-        <mc:Choice xmlns:p14="http://schemas.microsoft.com/office/powerpoint/2010/main" Requires="p14">
+      <mc:AlternateContent xmlns:mc="http://schemas.openxmlformats.org/markup-compatibility/2006" xmlns:p14="http://schemas.microsoft.com/office/powerpoint/2010/main">
+        <mc:Choice Requires="p14">
           <p:contentPart p14:bwMode="auto" r:id="rId16">
             <p14:nvContentPartPr>
               <p14:cNvPr id="10" name="墨迹 9">
@@ -28921,7 +28921,7 @@
             </p14:xfrm>
           </p:contentPart>
         </mc:Choice>
-        <mc:Fallback>
+        <mc:Fallback xmlns="">
           <p:pic>
             <p:nvPicPr>
               <p:cNvPr id="10" name="墨迹 9">
@@ -28972,8 +28972,8 @@
             <a:chExt cx="399960" cy="619920"/>
           </a:xfrm>
         </p:grpSpPr>
-        <mc:AlternateContent xmlns:mc="http://schemas.openxmlformats.org/markup-compatibility/2006">
-          <mc:Choice xmlns:p14="http://schemas.microsoft.com/office/powerpoint/2010/main" Requires="p14">
+        <mc:AlternateContent xmlns:mc="http://schemas.openxmlformats.org/markup-compatibility/2006" xmlns:p14="http://schemas.microsoft.com/office/powerpoint/2010/main">
+          <mc:Choice Requires="p14">
             <p:contentPart p14:bwMode="auto" r:id="rId18">
               <p14:nvContentPartPr>
                 <p14:cNvPr id="12" name="墨迹 11">
@@ -28992,7 +28992,7 @@
               </p14:xfrm>
             </p:contentPart>
           </mc:Choice>
-          <mc:Fallback>
+          <mc:Fallback xmlns="">
             <p:pic>
               <p:nvPicPr>
                 <p:cNvPr id="12" name="墨迹 11">
@@ -29023,8 +29023,8 @@
             </p:pic>
           </mc:Fallback>
         </mc:AlternateContent>
-        <mc:AlternateContent xmlns:mc="http://schemas.openxmlformats.org/markup-compatibility/2006">
-          <mc:Choice xmlns:p14="http://schemas.microsoft.com/office/powerpoint/2010/main" Requires="p14">
+        <mc:AlternateContent xmlns:mc="http://schemas.openxmlformats.org/markup-compatibility/2006" xmlns:p14="http://schemas.microsoft.com/office/powerpoint/2010/main">
+          <mc:Choice Requires="p14">
             <p:contentPart p14:bwMode="auto" r:id="rId20">
               <p14:nvContentPartPr>
                 <p14:cNvPr id="13" name="墨迹 12">
@@ -29043,7 +29043,7 @@
               </p14:xfrm>
             </p:contentPart>
           </mc:Choice>
-          <mc:Fallback>
+          <mc:Fallback xmlns="">
             <p:pic>
               <p:nvPicPr>
                 <p:cNvPr id="13" name="墨迹 12">
@@ -29095,8 +29095,8 @@
             <a:chExt cx="374040" cy="779760"/>
           </a:xfrm>
         </p:grpSpPr>
-        <mc:AlternateContent xmlns:mc="http://schemas.openxmlformats.org/markup-compatibility/2006">
-          <mc:Choice xmlns:p14="http://schemas.microsoft.com/office/powerpoint/2010/main" Requires="p14">
+        <mc:AlternateContent xmlns:mc="http://schemas.openxmlformats.org/markup-compatibility/2006" xmlns:p14="http://schemas.microsoft.com/office/powerpoint/2010/main">
+          <mc:Choice Requires="p14">
             <p:contentPart p14:bwMode="auto" r:id="rId22">
               <p14:nvContentPartPr>
                 <p14:cNvPr id="14" name="墨迹 13">
@@ -29115,7 +29115,7 @@
               </p14:xfrm>
             </p:contentPart>
           </mc:Choice>
-          <mc:Fallback>
+          <mc:Fallback xmlns="">
             <p:pic>
               <p:nvPicPr>
                 <p:cNvPr id="14" name="墨迹 13">
@@ -29146,8 +29146,8 @@
             </p:pic>
           </mc:Fallback>
         </mc:AlternateContent>
-        <mc:AlternateContent xmlns:mc="http://schemas.openxmlformats.org/markup-compatibility/2006">
-          <mc:Choice xmlns:p14="http://schemas.microsoft.com/office/powerpoint/2010/main" Requires="p14">
+        <mc:AlternateContent xmlns:mc="http://schemas.openxmlformats.org/markup-compatibility/2006" xmlns:p14="http://schemas.microsoft.com/office/powerpoint/2010/main">
+          <mc:Choice Requires="p14">
             <p:contentPart p14:bwMode="auto" r:id="rId24">
               <p14:nvContentPartPr>
                 <p14:cNvPr id="15" name="墨迹 14">
@@ -29166,7 +29166,7 @@
               </p14:xfrm>
             </p:contentPart>
           </mc:Choice>
-          <mc:Fallback>
+          <mc:Fallback xmlns="">
             <p:pic>
               <p:nvPicPr>
                 <p:cNvPr id="15" name="墨迹 14">
@@ -29218,8 +29218,8 @@
             <a:chExt cx="1653282" cy="1069361"/>
           </a:xfrm>
         </p:grpSpPr>
-        <mc:AlternateContent xmlns:mc="http://schemas.openxmlformats.org/markup-compatibility/2006">
-          <mc:Choice xmlns:p14="http://schemas.microsoft.com/office/powerpoint/2010/main" Requires="p14">
+        <mc:AlternateContent xmlns:mc="http://schemas.openxmlformats.org/markup-compatibility/2006" xmlns:p14="http://schemas.microsoft.com/office/powerpoint/2010/main">
+          <mc:Choice Requires="p14">
             <p:contentPart p14:bwMode="auto" r:id="rId26">
               <p14:nvContentPartPr>
                 <p14:cNvPr id="18" name="墨迹 17">
@@ -29238,7 +29238,7 @@
               </p14:xfrm>
             </p:contentPart>
           </mc:Choice>
-          <mc:Fallback>
+          <mc:Fallback xmlns="">
             <p:pic>
               <p:nvPicPr>
                 <p:cNvPr id="18" name="墨迹 17">
@@ -29269,8 +29269,8 @@
             </p:pic>
           </mc:Fallback>
         </mc:AlternateContent>
-        <mc:AlternateContent xmlns:mc="http://schemas.openxmlformats.org/markup-compatibility/2006">
-          <mc:Choice xmlns:p14="http://schemas.microsoft.com/office/powerpoint/2010/main" Requires="p14">
+        <mc:AlternateContent xmlns:mc="http://schemas.openxmlformats.org/markup-compatibility/2006" xmlns:p14="http://schemas.microsoft.com/office/powerpoint/2010/main">
+          <mc:Choice Requires="p14">
             <p:contentPart p14:bwMode="auto" r:id="rId28">
               <p14:nvContentPartPr>
                 <p14:cNvPr id="19" name="墨迹 18">
@@ -29289,7 +29289,7 @@
               </p14:xfrm>
             </p:contentPart>
           </mc:Choice>
-          <mc:Fallback>
+          <mc:Fallback xmlns="">
             <p:pic>
               <p:nvPicPr>
                 <p:cNvPr id="19" name="墨迹 18">
@@ -29320,8 +29320,8 @@
             </p:pic>
           </mc:Fallback>
         </mc:AlternateContent>
-        <mc:AlternateContent xmlns:mc="http://schemas.openxmlformats.org/markup-compatibility/2006">
-          <mc:Choice xmlns:p14="http://schemas.microsoft.com/office/powerpoint/2010/main" Requires="p14">
+        <mc:AlternateContent xmlns:mc="http://schemas.openxmlformats.org/markup-compatibility/2006" xmlns:p14="http://schemas.microsoft.com/office/powerpoint/2010/main">
+          <mc:Choice Requires="p14">
             <p:contentPart p14:bwMode="auto" r:id="rId30">
               <p14:nvContentPartPr>
                 <p14:cNvPr id="20" name="墨迹 19">
@@ -29340,7 +29340,7 @@
               </p14:xfrm>
             </p:contentPart>
           </mc:Choice>
-          <mc:Fallback>
+          <mc:Fallback xmlns="">
             <p:pic>
               <p:nvPicPr>
                 <p:cNvPr id="20" name="墨迹 19">
@@ -29371,8 +29371,8 @@
             </p:pic>
           </mc:Fallback>
         </mc:AlternateContent>
-        <mc:AlternateContent xmlns:mc="http://schemas.openxmlformats.org/markup-compatibility/2006">
-          <mc:Choice xmlns:p14="http://schemas.microsoft.com/office/powerpoint/2010/main" Requires="p14">
+        <mc:AlternateContent xmlns:mc="http://schemas.openxmlformats.org/markup-compatibility/2006" xmlns:p14="http://schemas.microsoft.com/office/powerpoint/2010/main">
+          <mc:Choice Requires="p14">
             <p:contentPart p14:bwMode="auto" r:id="rId32">
               <p14:nvContentPartPr>
                 <p14:cNvPr id="21" name="墨迹 20">
@@ -29391,7 +29391,7 @@
               </p14:xfrm>
             </p:contentPart>
           </mc:Choice>
-          <mc:Fallback>
+          <mc:Fallback xmlns="">
             <p:pic>
               <p:nvPicPr>
                 <p:cNvPr id="21" name="墨迹 20">
@@ -29422,8 +29422,8 @@
             </p:pic>
           </mc:Fallback>
         </mc:AlternateContent>
-        <mc:AlternateContent xmlns:mc="http://schemas.openxmlformats.org/markup-compatibility/2006">
-          <mc:Choice xmlns:p14="http://schemas.microsoft.com/office/powerpoint/2010/main" Requires="p14">
+        <mc:AlternateContent xmlns:mc="http://schemas.openxmlformats.org/markup-compatibility/2006" xmlns:p14="http://schemas.microsoft.com/office/powerpoint/2010/main">
+          <mc:Choice Requires="p14">
             <p:contentPart p14:bwMode="auto" r:id="rId34">
               <p14:nvContentPartPr>
                 <p14:cNvPr id="22" name="墨迹 21">
@@ -29442,7 +29442,7 @@
               </p14:xfrm>
             </p:contentPart>
           </mc:Choice>
-          <mc:Fallback>
+          <mc:Fallback xmlns="">
             <p:pic>
               <p:nvPicPr>
                 <p:cNvPr id="22" name="墨迹 21">
@@ -29473,8 +29473,8 @@
             </p:pic>
           </mc:Fallback>
         </mc:AlternateContent>
-        <mc:AlternateContent xmlns:mc="http://schemas.openxmlformats.org/markup-compatibility/2006">
-          <mc:Choice xmlns:p14="http://schemas.microsoft.com/office/powerpoint/2010/main" Requires="p14">
+        <mc:AlternateContent xmlns:mc="http://schemas.openxmlformats.org/markup-compatibility/2006" xmlns:p14="http://schemas.microsoft.com/office/powerpoint/2010/main">
+          <mc:Choice Requires="p14">
             <p:contentPart p14:bwMode="auto" r:id="rId36">
               <p14:nvContentPartPr>
                 <p14:cNvPr id="23" name="墨迹 22">
@@ -29493,7 +29493,7 @@
               </p14:xfrm>
             </p:contentPart>
           </mc:Choice>
-          <mc:Fallback>
+          <mc:Fallback xmlns="">
             <p:pic>
               <p:nvPicPr>
                 <p:cNvPr id="23" name="墨迹 22">
@@ -29524,8 +29524,8 @@
             </p:pic>
           </mc:Fallback>
         </mc:AlternateContent>
-        <mc:AlternateContent xmlns:mc="http://schemas.openxmlformats.org/markup-compatibility/2006">
-          <mc:Choice xmlns:p14="http://schemas.microsoft.com/office/powerpoint/2010/main" Requires="p14">
+        <mc:AlternateContent xmlns:mc="http://schemas.openxmlformats.org/markup-compatibility/2006" xmlns:p14="http://schemas.microsoft.com/office/powerpoint/2010/main">
+          <mc:Choice Requires="p14">
             <p:contentPart p14:bwMode="auto" r:id="rId38">
               <p14:nvContentPartPr>
                 <p14:cNvPr id="24" name="墨迹 23">
@@ -29544,7 +29544,7 @@
               </p14:xfrm>
             </p:contentPart>
           </mc:Choice>
-          <mc:Fallback>
+          <mc:Fallback xmlns="">
             <p:pic>
               <p:nvPicPr>
                 <p:cNvPr id="24" name="墨迹 23">
@@ -29575,8 +29575,8 @@
             </p:pic>
           </mc:Fallback>
         </mc:AlternateContent>
-        <mc:AlternateContent xmlns:mc="http://schemas.openxmlformats.org/markup-compatibility/2006">
-          <mc:Choice xmlns:p14="http://schemas.microsoft.com/office/powerpoint/2010/main" Requires="p14">
+        <mc:AlternateContent xmlns:mc="http://schemas.openxmlformats.org/markup-compatibility/2006" xmlns:p14="http://schemas.microsoft.com/office/powerpoint/2010/main">
+          <mc:Choice Requires="p14">
             <p:contentPart p14:bwMode="auto" r:id="rId40">
               <p14:nvContentPartPr>
                 <p14:cNvPr id="25" name="墨迹 24">
@@ -29595,7 +29595,7 @@
               </p14:xfrm>
             </p:contentPart>
           </mc:Choice>
-          <mc:Fallback>
+          <mc:Fallback xmlns="">
             <p:pic>
               <p:nvPicPr>
                 <p:cNvPr id="25" name="墨迹 24">
@@ -29626,8 +29626,8 @@
             </p:pic>
           </mc:Fallback>
         </mc:AlternateContent>
-        <mc:AlternateContent xmlns:mc="http://schemas.openxmlformats.org/markup-compatibility/2006">
-          <mc:Choice xmlns:p14="http://schemas.microsoft.com/office/powerpoint/2010/main" Requires="p14">
+        <mc:AlternateContent xmlns:mc="http://schemas.openxmlformats.org/markup-compatibility/2006" xmlns:p14="http://schemas.microsoft.com/office/powerpoint/2010/main">
+          <mc:Choice Requires="p14">
             <p:contentPart p14:bwMode="auto" r:id="rId42">
               <p14:nvContentPartPr>
                 <p14:cNvPr id="26" name="墨迹 25">
@@ -29646,7 +29646,7 @@
               </p14:xfrm>
             </p:contentPart>
           </mc:Choice>
-          <mc:Fallback>
+          <mc:Fallback xmlns="">
             <p:pic>
               <p:nvPicPr>
                 <p:cNvPr id="26" name="墨迹 25">
@@ -29677,8 +29677,8 @@
             </p:pic>
           </mc:Fallback>
         </mc:AlternateContent>
-        <mc:AlternateContent xmlns:mc="http://schemas.openxmlformats.org/markup-compatibility/2006">
-          <mc:Choice xmlns:p14="http://schemas.microsoft.com/office/powerpoint/2010/main" Requires="p14">
+        <mc:AlternateContent xmlns:mc="http://schemas.openxmlformats.org/markup-compatibility/2006" xmlns:p14="http://schemas.microsoft.com/office/powerpoint/2010/main">
+          <mc:Choice Requires="p14">
             <p:contentPart p14:bwMode="auto" r:id="rId44">
               <p14:nvContentPartPr>
                 <p14:cNvPr id="27" name="墨迹 26">
@@ -29697,7 +29697,7 @@
               </p14:xfrm>
             </p:contentPart>
           </mc:Choice>
-          <mc:Fallback>
+          <mc:Fallback xmlns="">
             <p:pic>
               <p:nvPicPr>
                 <p:cNvPr id="27" name="墨迹 26">
@@ -29728,8 +29728,8 @@
             </p:pic>
           </mc:Fallback>
         </mc:AlternateContent>
-        <mc:AlternateContent xmlns:mc="http://schemas.openxmlformats.org/markup-compatibility/2006">
-          <mc:Choice xmlns:p14="http://schemas.microsoft.com/office/powerpoint/2010/main" Requires="p14">
+        <mc:AlternateContent xmlns:mc="http://schemas.openxmlformats.org/markup-compatibility/2006" xmlns:p14="http://schemas.microsoft.com/office/powerpoint/2010/main">
+          <mc:Choice Requires="p14">
             <p:contentPart p14:bwMode="auto" r:id="rId46">
               <p14:nvContentPartPr>
                 <p14:cNvPr id="28" name="墨迹 27">
@@ -29748,7 +29748,7 @@
               </p14:xfrm>
             </p:contentPart>
           </mc:Choice>
-          <mc:Fallback>
+          <mc:Fallback xmlns="">
             <p:pic>
               <p:nvPicPr>
                 <p:cNvPr id="28" name="墨迹 27">
@@ -29779,8 +29779,8 @@
             </p:pic>
           </mc:Fallback>
         </mc:AlternateContent>
-        <mc:AlternateContent xmlns:mc="http://schemas.openxmlformats.org/markup-compatibility/2006">
-          <mc:Choice xmlns:p14="http://schemas.microsoft.com/office/powerpoint/2010/main" Requires="p14">
+        <mc:AlternateContent xmlns:mc="http://schemas.openxmlformats.org/markup-compatibility/2006" xmlns:p14="http://schemas.microsoft.com/office/powerpoint/2010/main">
+          <mc:Choice Requires="p14">
             <p:contentPart p14:bwMode="auto" r:id="rId48">
               <p14:nvContentPartPr>
                 <p14:cNvPr id="29" name="墨迹 28">
@@ -29799,7 +29799,7 @@
               </p14:xfrm>
             </p:contentPart>
           </mc:Choice>
-          <mc:Fallback>
+          <mc:Fallback xmlns="">
             <p:pic>
               <p:nvPicPr>
                 <p:cNvPr id="29" name="墨迹 28">
@@ -29830,8 +29830,8 @@
             </p:pic>
           </mc:Fallback>
         </mc:AlternateContent>
-        <mc:AlternateContent xmlns:mc="http://schemas.openxmlformats.org/markup-compatibility/2006">
-          <mc:Choice xmlns:p14="http://schemas.microsoft.com/office/powerpoint/2010/main" Requires="p14">
+        <mc:AlternateContent xmlns:mc="http://schemas.openxmlformats.org/markup-compatibility/2006" xmlns:p14="http://schemas.microsoft.com/office/powerpoint/2010/main">
+          <mc:Choice Requires="p14">
             <p:contentPart p14:bwMode="auto" r:id="rId50">
               <p14:nvContentPartPr>
                 <p14:cNvPr id="30" name="墨迹 29">
@@ -29850,7 +29850,7 @@
               </p14:xfrm>
             </p:contentPart>
           </mc:Choice>
-          <mc:Fallback>
+          <mc:Fallback xmlns="">
             <p:pic>
               <p:nvPicPr>
                 <p:cNvPr id="30" name="墨迹 29">
@@ -29881,8 +29881,8 @@
             </p:pic>
           </mc:Fallback>
         </mc:AlternateContent>
-        <mc:AlternateContent xmlns:mc="http://schemas.openxmlformats.org/markup-compatibility/2006">
-          <mc:Choice xmlns:p14="http://schemas.microsoft.com/office/powerpoint/2010/main" Requires="p14">
+        <mc:AlternateContent xmlns:mc="http://schemas.openxmlformats.org/markup-compatibility/2006" xmlns:p14="http://schemas.microsoft.com/office/powerpoint/2010/main">
+          <mc:Choice Requires="p14">
             <p:contentPart p14:bwMode="auto" r:id="rId52">
               <p14:nvContentPartPr>
                 <p14:cNvPr id="31" name="墨迹 30">
@@ -29901,7 +29901,7 @@
               </p14:xfrm>
             </p:contentPart>
           </mc:Choice>
-          <mc:Fallback>
+          <mc:Fallback xmlns="">
             <p:pic>
               <p:nvPicPr>
                 <p:cNvPr id="31" name="墨迹 30">
@@ -29932,8 +29932,8 @@
             </p:pic>
           </mc:Fallback>
         </mc:AlternateContent>
-        <mc:AlternateContent xmlns:mc="http://schemas.openxmlformats.org/markup-compatibility/2006">
-          <mc:Choice xmlns:p14="http://schemas.microsoft.com/office/powerpoint/2010/main" Requires="p14">
+        <mc:AlternateContent xmlns:mc="http://schemas.openxmlformats.org/markup-compatibility/2006" xmlns:p14="http://schemas.microsoft.com/office/powerpoint/2010/main">
+          <mc:Choice Requires="p14">
             <p:contentPart p14:bwMode="auto" r:id="rId54">
               <p14:nvContentPartPr>
                 <p14:cNvPr id="32" name="墨迹 31">
@@ -29952,7 +29952,7 @@
               </p14:xfrm>
             </p:contentPart>
           </mc:Choice>
-          <mc:Fallback>
+          <mc:Fallback xmlns="">
             <p:pic>
               <p:nvPicPr>
                 <p:cNvPr id="32" name="墨迹 31">
@@ -29983,8 +29983,8 @@
             </p:pic>
           </mc:Fallback>
         </mc:AlternateContent>
-        <mc:AlternateContent xmlns:mc="http://schemas.openxmlformats.org/markup-compatibility/2006">
-          <mc:Choice xmlns:p14="http://schemas.microsoft.com/office/powerpoint/2010/main" Requires="p14">
+        <mc:AlternateContent xmlns:mc="http://schemas.openxmlformats.org/markup-compatibility/2006" xmlns:p14="http://schemas.microsoft.com/office/powerpoint/2010/main">
+          <mc:Choice Requires="p14">
             <p:contentPart p14:bwMode="auto" r:id="rId56">
               <p14:nvContentPartPr>
                 <p14:cNvPr id="33" name="墨迹 32">
@@ -30003,7 +30003,7 @@
               </p14:xfrm>
             </p:contentPart>
           </mc:Choice>
-          <mc:Fallback>
+          <mc:Fallback xmlns="">
             <p:pic>
               <p:nvPicPr>
                 <p:cNvPr id="33" name="墨迹 32">
@@ -30034,8 +30034,8 @@
             </p:pic>
           </mc:Fallback>
         </mc:AlternateContent>
-        <mc:AlternateContent xmlns:mc="http://schemas.openxmlformats.org/markup-compatibility/2006">
-          <mc:Choice xmlns:p14="http://schemas.microsoft.com/office/powerpoint/2010/main" Requires="p14">
+        <mc:AlternateContent xmlns:mc="http://schemas.openxmlformats.org/markup-compatibility/2006" xmlns:p14="http://schemas.microsoft.com/office/powerpoint/2010/main">
+          <mc:Choice Requires="p14">
             <p:contentPart p14:bwMode="auto" r:id="rId58">
               <p14:nvContentPartPr>
                 <p14:cNvPr id="34" name="墨迹 33">
@@ -30054,7 +30054,7 @@
               </p14:xfrm>
             </p:contentPart>
           </mc:Choice>
-          <mc:Fallback>
+          <mc:Fallback xmlns="">
             <p:pic>
               <p:nvPicPr>
                 <p:cNvPr id="34" name="墨迹 33">
@@ -30085,8 +30085,8 @@
             </p:pic>
           </mc:Fallback>
         </mc:AlternateContent>
-        <mc:AlternateContent xmlns:mc="http://schemas.openxmlformats.org/markup-compatibility/2006">
-          <mc:Choice xmlns:p14="http://schemas.microsoft.com/office/powerpoint/2010/main" Requires="p14">
+        <mc:AlternateContent xmlns:mc="http://schemas.openxmlformats.org/markup-compatibility/2006" xmlns:p14="http://schemas.microsoft.com/office/powerpoint/2010/main">
+          <mc:Choice Requires="p14">
             <p:contentPart p14:bwMode="auto" r:id="rId60">
               <p14:nvContentPartPr>
                 <p14:cNvPr id="35" name="墨迹 34">
@@ -30105,7 +30105,7 @@
               </p14:xfrm>
             </p:contentPart>
           </mc:Choice>
-          <mc:Fallback>
+          <mc:Fallback xmlns="">
             <p:pic>
               <p:nvPicPr>
                 <p:cNvPr id="35" name="墨迹 34">
@@ -30136,8 +30136,8 @@
             </p:pic>
           </mc:Fallback>
         </mc:AlternateContent>
-        <mc:AlternateContent xmlns:mc="http://schemas.openxmlformats.org/markup-compatibility/2006">
-          <mc:Choice xmlns:p14="http://schemas.microsoft.com/office/powerpoint/2010/main" Requires="p14">
+        <mc:AlternateContent xmlns:mc="http://schemas.openxmlformats.org/markup-compatibility/2006" xmlns:p14="http://schemas.microsoft.com/office/powerpoint/2010/main">
+          <mc:Choice Requires="p14">
             <p:contentPart p14:bwMode="auto" r:id="rId62">
               <p14:nvContentPartPr>
                 <p14:cNvPr id="36" name="墨迹 35">
@@ -30156,7 +30156,7 @@
               </p14:xfrm>
             </p:contentPart>
           </mc:Choice>
-          <mc:Fallback>
+          <mc:Fallback xmlns="">
             <p:pic>
               <p:nvPicPr>
                 <p:cNvPr id="36" name="墨迹 35">
@@ -30187,8 +30187,8 @@
             </p:pic>
           </mc:Fallback>
         </mc:AlternateContent>
-        <mc:AlternateContent xmlns:mc="http://schemas.openxmlformats.org/markup-compatibility/2006">
-          <mc:Choice xmlns:p14="http://schemas.microsoft.com/office/powerpoint/2010/main" Requires="p14">
+        <mc:AlternateContent xmlns:mc="http://schemas.openxmlformats.org/markup-compatibility/2006" xmlns:p14="http://schemas.microsoft.com/office/powerpoint/2010/main">
+          <mc:Choice Requires="p14">
             <p:contentPart p14:bwMode="auto" r:id="rId64">
               <p14:nvContentPartPr>
                 <p14:cNvPr id="37" name="墨迹 36">
@@ -30207,7 +30207,7 @@
               </p14:xfrm>
             </p:contentPart>
           </mc:Choice>
-          <mc:Fallback>
+          <mc:Fallback xmlns="">
             <p:pic>
               <p:nvPicPr>
                 <p:cNvPr id="37" name="墨迹 36">
@@ -30238,8 +30238,8 @@
             </p:pic>
           </mc:Fallback>
         </mc:AlternateContent>
-        <mc:AlternateContent xmlns:mc="http://schemas.openxmlformats.org/markup-compatibility/2006">
-          <mc:Choice xmlns:p14="http://schemas.microsoft.com/office/powerpoint/2010/main" Requires="p14">
+        <mc:AlternateContent xmlns:mc="http://schemas.openxmlformats.org/markup-compatibility/2006" xmlns:p14="http://schemas.microsoft.com/office/powerpoint/2010/main">
+          <mc:Choice Requires="p14">
             <p:contentPart p14:bwMode="auto" r:id="rId66">
               <p14:nvContentPartPr>
                 <p14:cNvPr id="38" name="墨迹 37">
@@ -30258,7 +30258,7 @@
               </p14:xfrm>
             </p:contentPart>
           </mc:Choice>
-          <mc:Fallback>
+          <mc:Fallback xmlns="">
             <p:pic>
               <p:nvPicPr>
                 <p:cNvPr id="38" name="墨迹 37">
@@ -30310,8 +30310,8 @@
             <a:chExt cx="973310" cy="685358"/>
           </a:xfrm>
         </p:grpSpPr>
-        <mc:AlternateContent xmlns:mc="http://schemas.openxmlformats.org/markup-compatibility/2006">
-          <mc:Choice xmlns:p14="http://schemas.microsoft.com/office/powerpoint/2010/main" Requires="p14">
+        <mc:AlternateContent xmlns:mc="http://schemas.openxmlformats.org/markup-compatibility/2006" xmlns:p14="http://schemas.microsoft.com/office/powerpoint/2010/main">
+          <mc:Choice Requires="p14">
             <p:contentPart p14:bwMode="auto" r:id="rId68">
               <p14:nvContentPartPr>
                 <p14:cNvPr id="50" name="墨迹 49">
@@ -30330,7 +30330,7 @@
               </p14:xfrm>
             </p:contentPart>
           </mc:Choice>
-          <mc:Fallback>
+          <mc:Fallback xmlns="">
             <p:pic>
               <p:nvPicPr>
                 <p:cNvPr id="50" name="墨迹 49">
@@ -30361,8 +30361,8 @@
             </p:pic>
           </mc:Fallback>
         </mc:AlternateContent>
-        <mc:AlternateContent xmlns:mc="http://schemas.openxmlformats.org/markup-compatibility/2006">
-          <mc:Choice xmlns:p14="http://schemas.microsoft.com/office/powerpoint/2010/main" Requires="p14">
+        <mc:AlternateContent xmlns:mc="http://schemas.openxmlformats.org/markup-compatibility/2006" xmlns:p14="http://schemas.microsoft.com/office/powerpoint/2010/main">
+          <mc:Choice Requires="p14">
             <p:contentPart p14:bwMode="auto" r:id="rId70">
               <p14:nvContentPartPr>
                 <p14:cNvPr id="51" name="墨迹 50">
@@ -30381,7 +30381,7 @@
               </p14:xfrm>
             </p:contentPart>
           </mc:Choice>
-          <mc:Fallback>
+          <mc:Fallback xmlns="">
             <p:pic>
               <p:nvPicPr>
                 <p:cNvPr id="51" name="墨迹 50">
@@ -30412,8 +30412,8 @@
             </p:pic>
           </mc:Fallback>
         </mc:AlternateContent>
-        <mc:AlternateContent xmlns:mc="http://schemas.openxmlformats.org/markup-compatibility/2006">
-          <mc:Choice xmlns:p14="http://schemas.microsoft.com/office/powerpoint/2010/main" Requires="p14">
+        <mc:AlternateContent xmlns:mc="http://schemas.openxmlformats.org/markup-compatibility/2006" xmlns:p14="http://schemas.microsoft.com/office/powerpoint/2010/main">
+          <mc:Choice Requires="p14">
             <p:contentPart p14:bwMode="auto" r:id="rId72">
               <p14:nvContentPartPr>
                 <p14:cNvPr id="52" name="墨迹 51">
@@ -30432,7 +30432,7 @@
               </p14:xfrm>
             </p:contentPart>
           </mc:Choice>
-          <mc:Fallback>
+          <mc:Fallback xmlns="">
             <p:pic>
               <p:nvPicPr>
                 <p:cNvPr id="52" name="墨迹 51">
@@ -30463,8 +30463,8 @@
             </p:pic>
           </mc:Fallback>
         </mc:AlternateContent>
-        <mc:AlternateContent xmlns:mc="http://schemas.openxmlformats.org/markup-compatibility/2006">
-          <mc:Choice xmlns:p14="http://schemas.microsoft.com/office/powerpoint/2010/main" Requires="p14">
+        <mc:AlternateContent xmlns:mc="http://schemas.openxmlformats.org/markup-compatibility/2006" xmlns:p14="http://schemas.microsoft.com/office/powerpoint/2010/main">
+          <mc:Choice Requires="p14">
             <p:contentPart p14:bwMode="auto" r:id="rId74">
               <p14:nvContentPartPr>
                 <p14:cNvPr id="53" name="墨迹 52">
@@ -30483,7 +30483,7 @@
               </p14:xfrm>
             </p:contentPart>
           </mc:Choice>
-          <mc:Fallback>
+          <mc:Fallback xmlns="">
             <p:pic>
               <p:nvPicPr>
                 <p:cNvPr id="53" name="墨迹 52">
@@ -30514,8 +30514,8 @@
             </p:pic>
           </mc:Fallback>
         </mc:AlternateContent>
-        <mc:AlternateContent xmlns:mc="http://schemas.openxmlformats.org/markup-compatibility/2006">
-          <mc:Choice xmlns:p14="http://schemas.microsoft.com/office/powerpoint/2010/main" Requires="p14">
+        <mc:AlternateContent xmlns:mc="http://schemas.openxmlformats.org/markup-compatibility/2006" xmlns:p14="http://schemas.microsoft.com/office/powerpoint/2010/main">
+          <mc:Choice Requires="p14">
             <p:contentPart p14:bwMode="auto" r:id="rId76">
               <p14:nvContentPartPr>
                 <p14:cNvPr id="54" name="墨迹 53">
@@ -30534,7 +30534,7 @@
               </p14:xfrm>
             </p:contentPart>
           </mc:Choice>
-          <mc:Fallback>
+          <mc:Fallback xmlns="">
             <p:pic>
               <p:nvPicPr>
                 <p:cNvPr id="54" name="墨迹 53">
@@ -30565,8 +30565,8 @@
             </p:pic>
           </mc:Fallback>
         </mc:AlternateContent>
-        <mc:AlternateContent xmlns:mc="http://schemas.openxmlformats.org/markup-compatibility/2006">
-          <mc:Choice xmlns:p14="http://schemas.microsoft.com/office/powerpoint/2010/main" Requires="p14">
+        <mc:AlternateContent xmlns:mc="http://schemas.openxmlformats.org/markup-compatibility/2006" xmlns:p14="http://schemas.microsoft.com/office/powerpoint/2010/main">
+          <mc:Choice Requires="p14">
             <p:contentPart p14:bwMode="auto" r:id="rId78">
               <p14:nvContentPartPr>
                 <p14:cNvPr id="55" name="墨迹 54">
@@ -30585,7 +30585,7 @@
               </p14:xfrm>
             </p:contentPart>
           </mc:Choice>
-          <mc:Fallback>
+          <mc:Fallback xmlns="">
             <p:pic>
               <p:nvPicPr>
                 <p:cNvPr id="55" name="墨迹 54">
@@ -30637,8 +30637,8 @@
             <a:chExt cx="825906" cy="736778"/>
           </a:xfrm>
         </p:grpSpPr>
-        <mc:AlternateContent xmlns:mc="http://schemas.openxmlformats.org/markup-compatibility/2006">
-          <mc:Choice xmlns:p14="http://schemas.microsoft.com/office/powerpoint/2010/main" Requires="p14">
+        <mc:AlternateContent xmlns:mc="http://schemas.openxmlformats.org/markup-compatibility/2006" xmlns:p14="http://schemas.microsoft.com/office/powerpoint/2010/main">
+          <mc:Choice Requires="p14">
             <p:contentPart p14:bwMode="auto" r:id="rId80">
               <p14:nvContentPartPr>
                 <p14:cNvPr id="56" name="墨迹 55">
@@ -30657,7 +30657,7 @@
               </p14:xfrm>
             </p:contentPart>
           </mc:Choice>
-          <mc:Fallback>
+          <mc:Fallback xmlns="">
             <p:pic>
               <p:nvPicPr>
                 <p:cNvPr id="56" name="墨迹 55">
@@ -30688,8 +30688,8 @@
             </p:pic>
           </mc:Fallback>
         </mc:AlternateContent>
-        <mc:AlternateContent xmlns:mc="http://schemas.openxmlformats.org/markup-compatibility/2006">
-          <mc:Choice xmlns:p14="http://schemas.microsoft.com/office/powerpoint/2010/main" Requires="p14">
+        <mc:AlternateContent xmlns:mc="http://schemas.openxmlformats.org/markup-compatibility/2006" xmlns:p14="http://schemas.microsoft.com/office/powerpoint/2010/main">
+          <mc:Choice Requires="p14">
             <p:contentPart p14:bwMode="auto" r:id="rId82">
               <p14:nvContentPartPr>
                 <p14:cNvPr id="57" name="墨迹 56">
@@ -30708,7 +30708,7 @@
               </p14:xfrm>
             </p:contentPart>
           </mc:Choice>
-          <mc:Fallback>
+          <mc:Fallback xmlns="">
             <p:pic>
               <p:nvPicPr>
                 <p:cNvPr id="57" name="墨迹 56">
@@ -30739,8 +30739,8 @@
             </p:pic>
           </mc:Fallback>
         </mc:AlternateContent>
-        <mc:AlternateContent xmlns:mc="http://schemas.openxmlformats.org/markup-compatibility/2006">
-          <mc:Choice xmlns:p14="http://schemas.microsoft.com/office/powerpoint/2010/main" Requires="p14">
+        <mc:AlternateContent xmlns:mc="http://schemas.openxmlformats.org/markup-compatibility/2006" xmlns:p14="http://schemas.microsoft.com/office/powerpoint/2010/main">
+          <mc:Choice Requires="p14">
             <p:contentPart p14:bwMode="auto" r:id="rId84">
               <p14:nvContentPartPr>
                 <p14:cNvPr id="58" name="墨迹 57">
@@ -30759,7 +30759,7 @@
               </p14:xfrm>
             </p:contentPart>
           </mc:Choice>
-          <mc:Fallback>
+          <mc:Fallback xmlns="">
             <p:pic>
               <p:nvPicPr>
                 <p:cNvPr id="58" name="墨迹 57">
@@ -30790,8 +30790,8 @@
             </p:pic>
           </mc:Fallback>
         </mc:AlternateContent>
-        <mc:AlternateContent xmlns:mc="http://schemas.openxmlformats.org/markup-compatibility/2006">
-          <mc:Choice xmlns:p14="http://schemas.microsoft.com/office/powerpoint/2010/main" Requires="p14">
+        <mc:AlternateContent xmlns:mc="http://schemas.openxmlformats.org/markup-compatibility/2006" xmlns:p14="http://schemas.microsoft.com/office/powerpoint/2010/main">
+          <mc:Choice Requires="p14">
             <p:contentPart p14:bwMode="auto" r:id="rId86">
               <p14:nvContentPartPr>
                 <p14:cNvPr id="59" name="墨迹 58">
@@ -30810,7 +30810,7 @@
               </p14:xfrm>
             </p:contentPart>
           </mc:Choice>
-          <mc:Fallback>
+          <mc:Fallback xmlns="">
             <p:pic>
               <p:nvPicPr>
                 <p:cNvPr id="59" name="墨迹 58">
@@ -30841,8 +30841,8 @@
             </p:pic>
           </mc:Fallback>
         </mc:AlternateContent>
-        <mc:AlternateContent xmlns:mc="http://schemas.openxmlformats.org/markup-compatibility/2006">
-          <mc:Choice xmlns:p14="http://schemas.microsoft.com/office/powerpoint/2010/main" Requires="p14">
+        <mc:AlternateContent xmlns:mc="http://schemas.openxmlformats.org/markup-compatibility/2006" xmlns:p14="http://schemas.microsoft.com/office/powerpoint/2010/main">
+          <mc:Choice Requires="p14">
             <p:contentPart p14:bwMode="auto" r:id="rId88">
               <p14:nvContentPartPr>
                 <p14:cNvPr id="60" name="墨迹 59">
@@ -30861,7 +30861,7 @@
               </p14:xfrm>
             </p:contentPart>
           </mc:Choice>
-          <mc:Fallback>
+          <mc:Fallback xmlns="">
             <p:pic>
               <p:nvPicPr>
                 <p:cNvPr id="60" name="墨迹 59">
@@ -30892,8 +30892,8 @@
             </p:pic>
           </mc:Fallback>
         </mc:AlternateContent>
-        <mc:AlternateContent xmlns:mc="http://schemas.openxmlformats.org/markup-compatibility/2006">
-          <mc:Choice xmlns:p14="http://schemas.microsoft.com/office/powerpoint/2010/main" Requires="p14">
+        <mc:AlternateContent xmlns:mc="http://schemas.openxmlformats.org/markup-compatibility/2006" xmlns:p14="http://schemas.microsoft.com/office/powerpoint/2010/main">
+          <mc:Choice Requires="p14">
             <p:contentPart p14:bwMode="auto" r:id="rId90">
               <p14:nvContentPartPr>
                 <p14:cNvPr id="61" name="墨迹 60">
@@ -30912,7 +30912,7 @@
               </p14:xfrm>
             </p:contentPart>
           </mc:Choice>
-          <mc:Fallback>
+          <mc:Fallback xmlns="">
             <p:pic>
               <p:nvPicPr>
                 <p:cNvPr id="61" name="墨迹 60">
@@ -30943,8 +30943,8 @@
             </p:pic>
           </mc:Fallback>
         </mc:AlternateContent>
-        <mc:AlternateContent xmlns:mc="http://schemas.openxmlformats.org/markup-compatibility/2006">
-          <mc:Choice xmlns:p14="http://schemas.microsoft.com/office/powerpoint/2010/main" Requires="p14">
+        <mc:AlternateContent xmlns:mc="http://schemas.openxmlformats.org/markup-compatibility/2006" xmlns:p14="http://schemas.microsoft.com/office/powerpoint/2010/main">
+          <mc:Choice Requires="p14">
             <p:contentPart p14:bwMode="auto" r:id="rId92">
               <p14:nvContentPartPr>
                 <p14:cNvPr id="62" name="墨迹 61">
@@ -30963,7 +30963,7 @@
               </p14:xfrm>
             </p:contentPart>
           </mc:Choice>
-          <mc:Fallback>
+          <mc:Fallback xmlns="">
             <p:pic>
               <p:nvPicPr>
                 <p:cNvPr id="62" name="墨迹 61">
@@ -30994,8 +30994,8 @@
             </p:pic>
           </mc:Fallback>
         </mc:AlternateContent>
-        <mc:AlternateContent xmlns:mc="http://schemas.openxmlformats.org/markup-compatibility/2006">
-          <mc:Choice xmlns:p14="http://schemas.microsoft.com/office/powerpoint/2010/main" Requires="p14">
+        <mc:AlternateContent xmlns:mc="http://schemas.openxmlformats.org/markup-compatibility/2006" xmlns:p14="http://schemas.microsoft.com/office/powerpoint/2010/main">
+          <mc:Choice Requires="p14">
             <p:contentPart p14:bwMode="auto" r:id="rId94">
               <p14:nvContentPartPr>
                 <p14:cNvPr id="63" name="墨迹 62">
@@ -31014,7 +31014,7 @@
               </p14:xfrm>
             </p:contentPart>
           </mc:Choice>
-          <mc:Fallback>
+          <mc:Fallback xmlns="">
             <p:pic>
               <p:nvPicPr>
                 <p:cNvPr id="63" name="墨迹 62">
@@ -31045,8 +31045,8 @@
             </p:pic>
           </mc:Fallback>
         </mc:AlternateContent>
-        <mc:AlternateContent xmlns:mc="http://schemas.openxmlformats.org/markup-compatibility/2006">
-          <mc:Choice xmlns:p14="http://schemas.microsoft.com/office/powerpoint/2010/main" Requires="p14">
+        <mc:AlternateContent xmlns:mc="http://schemas.openxmlformats.org/markup-compatibility/2006" xmlns:p14="http://schemas.microsoft.com/office/powerpoint/2010/main">
+          <mc:Choice Requires="p14">
             <p:contentPart p14:bwMode="auto" r:id="rId96">
               <p14:nvContentPartPr>
                 <p14:cNvPr id="64" name="墨迹 63">
@@ -31065,7 +31065,7 @@
               </p14:xfrm>
             </p:contentPart>
           </mc:Choice>
-          <mc:Fallback>
+          <mc:Fallback xmlns="">
             <p:pic>
               <p:nvPicPr>
                 <p:cNvPr id="64" name="墨迹 63">
@@ -31096,8 +31096,8 @@
             </p:pic>
           </mc:Fallback>
         </mc:AlternateContent>
-        <mc:AlternateContent xmlns:mc="http://schemas.openxmlformats.org/markup-compatibility/2006">
-          <mc:Choice xmlns:p14="http://schemas.microsoft.com/office/powerpoint/2010/main" Requires="p14">
+        <mc:AlternateContent xmlns:mc="http://schemas.openxmlformats.org/markup-compatibility/2006" xmlns:p14="http://schemas.microsoft.com/office/powerpoint/2010/main">
+          <mc:Choice Requires="p14">
             <p:contentPart p14:bwMode="auto" r:id="rId98">
               <p14:nvContentPartPr>
                 <p14:cNvPr id="65" name="墨迹 64">
@@ -31116,7 +31116,7 @@
               </p14:xfrm>
             </p:contentPart>
           </mc:Choice>
-          <mc:Fallback>
+          <mc:Fallback xmlns="">
             <p:pic>
               <p:nvPicPr>
                 <p:cNvPr id="65" name="墨迹 64">
@@ -31147,8 +31147,8 @@
             </p:pic>
           </mc:Fallback>
         </mc:AlternateContent>
-        <mc:AlternateContent xmlns:mc="http://schemas.openxmlformats.org/markup-compatibility/2006">
-          <mc:Choice xmlns:p14="http://schemas.microsoft.com/office/powerpoint/2010/main" Requires="p14">
+        <mc:AlternateContent xmlns:mc="http://schemas.openxmlformats.org/markup-compatibility/2006" xmlns:p14="http://schemas.microsoft.com/office/powerpoint/2010/main">
+          <mc:Choice Requires="p14">
             <p:contentPart p14:bwMode="auto" r:id="rId100">
               <p14:nvContentPartPr>
                 <p14:cNvPr id="66" name="墨迹 65">
@@ -31167,7 +31167,7 @@
               </p14:xfrm>
             </p:contentPart>
           </mc:Choice>
-          <mc:Fallback>
+          <mc:Fallback xmlns="">
             <p:pic>
               <p:nvPicPr>
                 <p:cNvPr id="66" name="墨迹 65">
@@ -31198,8 +31198,8 @@
             </p:pic>
           </mc:Fallback>
         </mc:AlternateContent>
-        <mc:AlternateContent xmlns:mc="http://schemas.openxmlformats.org/markup-compatibility/2006">
-          <mc:Choice xmlns:p14="http://schemas.microsoft.com/office/powerpoint/2010/main" Requires="p14">
+        <mc:AlternateContent xmlns:mc="http://schemas.openxmlformats.org/markup-compatibility/2006" xmlns:p14="http://schemas.microsoft.com/office/powerpoint/2010/main">
+          <mc:Choice Requires="p14">
             <p:contentPart p14:bwMode="auto" r:id="rId102">
               <p14:nvContentPartPr>
                 <p14:cNvPr id="67" name="墨迹 66">
@@ -31218,7 +31218,7 @@
               </p14:xfrm>
             </p:contentPart>
           </mc:Choice>
-          <mc:Fallback>
+          <mc:Fallback xmlns="">
             <p:pic>
               <p:nvPicPr>
                 <p:cNvPr id="67" name="墨迹 66">
@@ -31249,8 +31249,8 @@
             </p:pic>
           </mc:Fallback>
         </mc:AlternateContent>
-        <mc:AlternateContent xmlns:mc="http://schemas.openxmlformats.org/markup-compatibility/2006">
-          <mc:Choice xmlns:p14="http://schemas.microsoft.com/office/powerpoint/2010/main" Requires="p14">
+        <mc:AlternateContent xmlns:mc="http://schemas.openxmlformats.org/markup-compatibility/2006" xmlns:p14="http://schemas.microsoft.com/office/powerpoint/2010/main">
+          <mc:Choice Requires="p14">
             <p:contentPart p14:bwMode="auto" r:id="rId104">
               <p14:nvContentPartPr>
                 <p14:cNvPr id="71" name="墨迹 70">
@@ -31269,7 +31269,7 @@
               </p14:xfrm>
             </p:contentPart>
           </mc:Choice>
-          <mc:Fallback>
+          <mc:Fallback xmlns="">
             <p:pic>
               <p:nvPicPr>
                 <p:cNvPr id="71" name="墨迹 70">
@@ -31300,8 +31300,8 @@
             </p:pic>
           </mc:Fallback>
         </mc:AlternateContent>
-        <mc:AlternateContent xmlns:mc="http://schemas.openxmlformats.org/markup-compatibility/2006">
-          <mc:Choice xmlns:p14="http://schemas.microsoft.com/office/powerpoint/2010/main" Requires="p14">
+        <mc:AlternateContent xmlns:mc="http://schemas.openxmlformats.org/markup-compatibility/2006" xmlns:p14="http://schemas.microsoft.com/office/powerpoint/2010/main">
+          <mc:Choice Requires="p14">
             <p:contentPart p14:bwMode="auto" r:id="rId106">
               <p14:nvContentPartPr>
                 <p14:cNvPr id="72" name="墨迹 71">
@@ -31320,7 +31320,7 @@
               </p14:xfrm>
             </p:contentPart>
           </mc:Choice>
-          <mc:Fallback>
+          <mc:Fallback xmlns="">
             <p:pic>
               <p:nvPicPr>
                 <p:cNvPr id="72" name="墨迹 71">
@@ -31372,8 +31372,8 @@
             <a:chExt cx="355320" cy="568080"/>
           </a:xfrm>
         </p:grpSpPr>
-        <mc:AlternateContent xmlns:mc="http://schemas.openxmlformats.org/markup-compatibility/2006">
-          <mc:Choice xmlns:p14="http://schemas.microsoft.com/office/powerpoint/2010/main" Requires="p14">
+        <mc:AlternateContent xmlns:mc="http://schemas.openxmlformats.org/markup-compatibility/2006" xmlns:p14="http://schemas.microsoft.com/office/powerpoint/2010/main">
+          <mc:Choice Requires="p14">
             <p:contentPart p14:bwMode="auto" r:id="rId108">
               <p14:nvContentPartPr>
                 <p14:cNvPr id="76" name="墨迹 75">
@@ -31392,7 +31392,7 @@
               </p14:xfrm>
             </p:contentPart>
           </mc:Choice>
-          <mc:Fallback>
+          <mc:Fallback xmlns="">
             <p:pic>
               <p:nvPicPr>
                 <p:cNvPr id="76" name="墨迹 75">
@@ -31423,8 +31423,8 @@
             </p:pic>
           </mc:Fallback>
         </mc:AlternateContent>
-        <mc:AlternateContent xmlns:mc="http://schemas.openxmlformats.org/markup-compatibility/2006">
-          <mc:Choice xmlns:p14="http://schemas.microsoft.com/office/powerpoint/2010/main" Requires="p14">
+        <mc:AlternateContent xmlns:mc="http://schemas.openxmlformats.org/markup-compatibility/2006" xmlns:p14="http://schemas.microsoft.com/office/powerpoint/2010/main">
+          <mc:Choice Requires="p14">
             <p:contentPart p14:bwMode="auto" r:id="rId110">
               <p14:nvContentPartPr>
                 <p14:cNvPr id="77" name="墨迹 76">
@@ -31443,7 +31443,7 @@
               </p14:xfrm>
             </p:contentPart>
           </mc:Choice>
-          <mc:Fallback>
+          <mc:Fallback xmlns="">
             <p:pic>
               <p:nvPicPr>
                 <p:cNvPr id="77" name="墨迹 76">
@@ -31474,8 +31474,8 @@
             </p:pic>
           </mc:Fallback>
         </mc:AlternateContent>
-        <mc:AlternateContent xmlns:mc="http://schemas.openxmlformats.org/markup-compatibility/2006">
-          <mc:Choice xmlns:p14="http://schemas.microsoft.com/office/powerpoint/2010/main" Requires="p14">
+        <mc:AlternateContent xmlns:mc="http://schemas.openxmlformats.org/markup-compatibility/2006" xmlns:p14="http://schemas.microsoft.com/office/powerpoint/2010/main">
+          <mc:Choice Requires="p14">
             <p:contentPart p14:bwMode="auto" r:id="rId112">
               <p14:nvContentPartPr>
                 <p14:cNvPr id="78" name="墨迹 77">
@@ -31494,7 +31494,7 @@
               </p14:xfrm>
             </p:contentPart>
           </mc:Choice>
-          <mc:Fallback>
+          <mc:Fallback xmlns="">
             <p:pic>
               <p:nvPicPr>
                 <p:cNvPr id="78" name="墨迹 77">
@@ -31546,8 +31546,8 @@
             <a:chExt cx="402480" cy="594000"/>
           </a:xfrm>
         </p:grpSpPr>
-        <mc:AlternateContent xmlns:mc="http://schemas.openxmlformats.org/markup-compatibility/2006">
-          <mc:Choice xmlns:p14="http://schemas.microsoft.com/office/powerpoint/2010/main" Requires="p14">
+        <mc:AlternateContent xmlns:mc="http://schemas.openxmlformats.org/markup-compatibility/2006" xmlns:p14="http://schemas.microsoft.com/office/powerpoint/2010/main">
+          <mc:Choice Requires="p14">
             <p:contentPart p14:bwMode="auto" r:id="rId114">
               <p14:nvContentPartPr>
                 <p14:cNvPr id="80" name="墨迹 79">
@@ -31566,7 +31566,7 @@
               </p14:xfrm>
             </p:contentPart>
           </mc:Choice>
-          <mc:Fallback>
+          <mc:Fallback xmlns="">
             <p:pic>
               <p:nvPicPr>
                 <p:cNvPr id="80" name="墨迹 79">
@@ -31597,8 +31597,8 @@
             </p:pic>
           </mc:Fallback>
         </mc:AlternateContent>
-        <mc:AlternateContent xmlns:mc="http://schemas.openxmlformats.org/markup-compatibility/2006">
-          <mc:Choice xmlns:p14="http://schemas.microsoft.com/office/powerpoint/2010/main" Requires="p14">
+        <mc:AlternateContent xmlns:mc="http://schemas.openxmlformats.org/markup-compatibility/2006" xmlns:p14="http://schemas.microsoft.com/office/powerpoint/2010/main">
+          <mc:Choice Requires="p14">
             <p:contentPart p14:bwMode="auto" r:id="rId116">
               <p14:nvContentPartPr>
                 <p14:cNvPr id="81" name="墨迹 80">
@@ -31617,7 +31617,7 @@
               </p14:xfrm>
             </p:contentPart>
           </mc:Choice>
-          <mc:Fallback>
+          <mc:Fallback xmlns="">
             <p:pic>
               <p:nvPicPr>
                 <p:cNvPr id="81" name="墨迹 80">
@@ -31648,8 +31648,8 @@
             </p:pic>
           </mc:Fallback>
         </mc:AlternateContent>
-        <mc:AlternateContent xmlns:mc="http://schemas.openxmlformats.org/markup-compatibility/2006">
-          <mc:Choice xmlns:p14="http://schemas.microsoft.com/office/powerpoint/2010/main" Requires="p14">
+        <mc:AlternateContent xmlns:mc="http://schemas.openxmlformats.org/markup-compatibility/2006" xmlns:p14="http://schemas.microsoft.com/office/powerpoint/2010/main">
+          <mc:Choice Requires="p14">
             <p:contentPart p14:bwMode="auto" r:id="rId118">
               <p14:nvContentPartPr>
                 <p14:cNvPr id="82" name="墨迹 81">
@@ -31668,7 +31668,7 @@
               </p14:xfrm>
             </p:contentPart>
           </mc:Choice>
-          <mc:Fallback>
+          <mc:Fallback xmlns="">
             <p:pic>
               <p:nvPicPr>
                 <p:cNvPr id="82" name="墨迹 81">
@@ -31720,8 +31720,8 @@
             <a:chExt cx="365760" cy="662760"/>
           </a:xfrm>
         </p:grpSpPr>
-        <mc:AlternateContent xmlns:mc="http://schemas.openxmlformats.org/markup-compatibility/2006">
-          <mc:Choice xmlns:p14="http://schemas.microsoft.com/office/powerpoint/2010/main" Requires="p14">
+        <mc:AlternateContent xmlns:mc="http://schemas.openxmlformats.org/markup-compatibility/2006" xmlns:p14="http://schemas.microsoft.com/office/powerpoint/2010/main">
+          <mc:Choice Requires="p14">
             <p:contentPart p14:bwMode="auto" r:id="rId120">
               <p14:nvContentPartPr>
                 <p14:cNvPr id="83" name="墨迹 82">
@@ -31740,7 +31740,7 @@
               </p14:xfrm>
             </p:contentPart>
           </mc:Choice>
-          <mc:Fallback>
+          <mc:Fallback xmlns="">
             <p:pic>
               <p:nvPicPr>
                 <p:cNvPr id="83" name="墨迹 82">
@@ -31771,8 +31771,8 @@
             </p:pic>
           </mc:Fallback>
         </mc:AlternateContent>
-        <mc:AlternateContent xmlns:mc="http://schemas.openxmlformats.org/markup-compatibility/2006">
-          <mc:Choice xmlns:p14="http://schemas.microsoft.com/office/powerpoint/2010/main" Requires="p14">
+        <mc:AlternateContent xmlns:mc="http://schemas.openxmlformats.org/markup-compatibility/2006" xmlns:p14="http://schemas.microsoft.com/office/powerpoint/2010/main">
+          <mc:Choice Requires="p14">
             <p:contentPart p14:bwMode="auto" r:id="rId122">
               <p14:nvContentPartPr>
                 <p14:cNvPr id="84" name="墨迹 83">
@@ -31791,7 +31791,7 @@
               </p14:xfrm>
             </p:contentPart>
           </mc:Choice>
-          <mc:Fallback>
+          <mc:Fallback xmlns="">
             <p:pic>
               <p:nvPicPr>
                 <p:cNvPr id="84" name="墨迹 83">
@@ -31822,8 +31822,8 @@
             </p:pic>
           </mc:Fallback>
         </mc:AlternateContent>
-        <mc:AlternateContent xmlns:mc="http://schemas.openxmlformats.org/markup-compatibility/2006">
-          <mc:Choice xmlns:p14="http://schemas.microsoft.com/office/powerpoint/2010/main" Requires="p14">
+        <mc:AlternateContent xmlns:mc="http://schemas.openxmlformats.org/markup-compatibility/2006" xmlns:p14="http://schemas.microsoft.com/office/powerpoint/2010/main">
+          <mc:Choice Requires="p14">
             <p:contentPart p14:bwMode="auto" r:id="rId124">
               <p14:nvContentPartPr>
                 <p14:cNvPr id="85" name="墨迹 84">
@@ -31842,7 +31842,7 @@
               </p14:xfrm>
             </p:contentPart>
           </mc:Choice>
-          <mc:Fallback>
+          <mc:Fallback xmlns="">
             <p:pic>
               <p:nvPicPr>
                 <p:cNvPr id="85" name="墨迹 84">
@@ -31894,8 +31894,8 @@
             <a:chExt cx="520920" cy="691920"/>
           </a:xfrm>
         </p:grpSpPr>
-        <mc:AlternateContent xmlns:mc="http://schemas.openxmlformats.org/markup-compatibility/2006">
-          <mc:Choice xmlns:p14="http://schemas.microsoft.com/office/powerpoint/2010/main" Requires="p14">
+        <mc:AlternateContent xmlns:mc="http://schemas.openxmlformats.org/markup-compatibility/2006" xmlns:p14="http://schemas.microsoft.com/office/powerpoint/2010/main">
+          <mc:Choice Requires="p14">
             <p:contentPart p14:bwMode="auto" r:id="rId126">
               <p14:nvContentPartPr>
                 <p14:cNvPr id="88" name="墨迹 87">
@@ -31914,7 +31914,7 @@
               </p14:xfrm>
             </p:contentPart>
           </mc:Choice>
-          <mc:Fallback>
+          <mc:Fallback xmlns="">
             <p:pic>
               <p:nvPicPr>
                 <p:cNvPr id="88" name="墨迹 87">
@@ -31945,8 +31945,8 @@
             </p:pic>
           </mc:Fallback>
         </mc:AlternateContent>
-        <mc:AlternateContent xmlns:mc="http://schemas.openxmlformats.org/markup-compatibility/2006">
-          <mc:Choice xmlns:p14="http://schemas.microsoft.com/office/powerpoint/2010/main" Requires="p14">
+        <mc:AlternateContent xmlns:mc="http://schemas.openxmlformats.org/markup-compatibility/2006" xmlns:p14="http://schemas.microsoft.com/office/powerpoint/2010/main">
+          <mc:Choice Requires="p14">
             <p:contentPart p14:bwMode="auto" r:id="rId128">
               <p14:nvContentPartPr>
                 <p14:cNvPr id="89" name="墨迹 88">
@@ -31965,7 +31965,7 @@
               </p14:xfrm>
             </p:contentPart>
           </mc:Choice>
-          <mc:Fallback>
+          <mc:Fallback xmlns="">
             <p:pic>
               <p:nvPicPr>
                 <p:cNvPr id="89" name="墨迹 88">
@@ -31996,8 +31996,8 @@
             </p:pic>
           </mc:Fallback>
         </mc:AlternateContent>
-        <mc:AlternateContent xmlns:mc="http://schemas.openxmlformats.org/markup-compatibility/2006">
-          <mc:Choice xmlns:p14="http://schemas.microsoft.com/office/powerpoint/2010/main" Requires="p14">
+        <mc:AlternateContent xmlns:mc="http://schemas.openxmlformats.org/markup-compatibility/2006" xmlns:p14="http://schemas.microsoft.com/office/powerpoint/2010/main">
+          <mc:Choice Requires="p14">
             <p:contentPart p14:bwMode="auto" r:id="rId130">
               <p14:nvContentPartPr>
                 <p14:cNvPr id="90" name="墨迹 89">
@@ -32016,7 +32016,7 @@
               </p14:xfrm>
             </p:contentPart>
           </mc:Choice>
-          <mc:Fallback>
+          <mc:Fallback xmlns="">
             <p:pic>
               <p:nvPicPr>
                 <p:cNvPr id="90" name="墨迹 89">
@@ -32047,8 +32047,8 @@
             </p:pic>
           </mc:Fallback>
         </mc:AlternateContent>
-        <mc:AlternateContent xmlns:mc="http://schemas.openxmlformats.org/markup-compatibility/2006">
-          <mc:Choice xmlns:p14="http://schemas.microsoft.com/office/powerpoint/2010/main" Requires="p14">
+        <mc:AlternateContent xmlns:mc="http://schemas.openxmlformats.org/markup-compatibility/2006" xmlns:p14="http://schemas.microsoft.com/office/powerpoint/2010/main">
+          <mc:Choice Requires="p14">
             <p:contentPart p14:bwMode="auto" r:id="rId132">
               <p14:nvContentPartPr>
                 <p14:cNvPr id="91" name="墨迹 90">
@@ -32067,7 +32067,7 @@
               </p14:xfrm>
             </p:contentPart>
           </mc:Choice>
-          <mc:Fallback>
+          <mc:Fallback xmlns="">
             <p:pic>
               <p:nvPicPr>
                 <p:cNvPr id="91" name="墨迹 90">
@@ -32098,8 +32098,8 @@
             </p:pic>
           </mc:Fallback>
         </mc:AlternateContent>
-        <mc:AlternateContent xmlns:mc="http://schemas.openxmlformats.org/markup-compatibility/2006">
-          <mc:Choice xmlns:p14="http://schemas.microsoft.com/office/powerpoint/2010/main" Requires="p14">
+        <mc:AlternateContent xmlns:mc="http://schemas.openxmlformats.org/markup-compatibility/2006" xmlns:p14="http://schemas.microsoft.com/office/powerpoint/2010/main">
+          <mc:Choice Requires="p14">
             <p:contentPart p14:bwMode="auto" r:id="rId134">
               <p14:nvContentPartPr>
                 <p14:cNvPr id="92" name="墨迹 91">
@@ -32118,7 +32118,7 @@
               </p14:xfrm>
             </p:contentPart>
           </mc:Choice>
-          <mc:Fallback>
+          <mc:Fallback xmlns="">
             <p:pic>
               <p:nvPicPr>
                 <p:cNvPr id="92" name="墨迹 91">
@@ -32170,8 +32170,8 @@
             <a:chExt cx="664920" cy="847080"/>
           </a:xfrm>
         </p:grpSpPr>
-        <mc:AlternateContent xmlns:mc="http://schemas.openxmlformats.org/markup-compatibility/2006">
-          <mc:Choice xmlns:p14="http://schemas.microsoft.com/office/powerpoint/2010/main" Requires="p14">
+        <mc:AlternateContent xmlns:mc="http://schemas.openxmlformats.org/markup-compatibility/2006" xmlns:p14="http://schemas.microsoft.com/office/powerpoint/2010/main">
+          <mc:Choice Requires="p14">
             <p:contentPart p14:bwMode="auto" r:id="rId136">
               <p14:nvContentPartPr>
                 <p14:cNvPr id="93" name="墨迹 92">
@@ -32190,7 +32190,7 @@
               </p14:xfrm>
             </p:contentPart>
           </mc:Choice>
-          <mc:Fallback>
+          <mc:Fallback xmlns="">
             <p:pic>
               <p:nvPicPr>
                 <p:cNvPr id="93" name="墨迹 92">
@@ -32221,8 +32221,8 @@
             </p:pic>
           </mc:Fallback>
         </mc:AlternateContent>
-        <mc:AlternateContent xmlns:mc="http://schemas.openxmlformats.org/markup-compatibility/2006">
-          <mc:Choice xmlns:p14="http://schemas.microsoft.com/office/powerpoint/2010/main" Requires="p14">
+        <mc:AlternateContent xmlns:mc="http://schemas.openxmlformats.org/markup-compatibility/2006" xmlns:p14="http://schemas.microsoft.com/office/powerpoint/2010/main">
+          <mc:Choice Requires="p14">
             <p:contentPart p14:bwMode="auto" r:id="rId138">
               <p14:nvContentPartPr>
                 <p14:cNvPr id="94" name="墨迹 93">
@@ -32241,7 +32241,7 @@
               </p14:xfrm>
             </p:contentPart>
           </mc:Choice>
-          <mc:Fallback>
+          <mc:Fallback xmlns="">
             <p:pic>
               <p:nvPicPr>
                 <p:cNvPr id="94" name="墨迹 93">
@@ -32272,8 +32272,8 @@
             </p:pic>
           </mc:Fallback>
         </mc:AlternateContent>
-        <mc:AlternateContent xmlns:mc="http://schemas.openxmlformats.org/markup-compatibility/2006">
-          <mc:Choice xmlns:p14="http://schemas.microsoft.com/office/powerpoint/2010/main" Requires="p14">
+        <mc:AlternateContent xmlns:mc="http://schemas.openxmlformats.org/markup-compatibility/2006" xmlns:p14="http://schemas.microsoft.com/office/powerpoint/2010/main">
+          <mc:Choice Requires="p14">
             <p:contentPart p14:bwMode="auto" r:id="rId140">
               <p14:nvContentPartPr>
                 <p14:cNvPr id="95" name="墨迹 94">
@@ -32292,7 +32292,7 @@
               </p14:xfrm>
             </p:contentPart>
           </mc:Choice>
-          <mc:Fallback>
+          <mc:Fallback xmlns="">
             <p:pic>
               <p:nvPicPr>
                 <p:cNvPr id="95" name="墨迹 94">
@@ -32344,8 +32344,8 @@
             <a:chExt cx="684360" cy="1267560"/>
           </a:xfrm>
         </p:grpSpPr>
-        <mc:AlternateContent xmlns:mc="http://schemas.openxmlformats.org/markup-compatibility/2006">
-          <mc:Choice xmlns:p14="http://schemas.microsoft.com/office/powerpoint/2010/main" Requires="p14">
+        <mc:AlternateContent xmlns:mc="http://schemas.openxmlformats.org/markup-compatibility/2006" xmlns:p14="http://schemas.microsoft.com/office/powerpoint/2010/main">
+          <mc:Choice Requires="p14">
             <p:contentPart p14:bwMode="auto" r:id="rId142">
               <p14:nvContentPartPr>
                 <p14:cNvPr id="98" name="墨迹 97">
@@ -32364,7 +32364,7 @@
               </p14:xfrm>
             </p:contentPart>
           </mc:Choice>
-          <mc:Fallback>
+          <mc:Fallback xmlns="">
             <p:pic>
               <p:nvPicPr>
                 <p:cNvPr id="98" name="墨迹 97">
@@ -32395,8 +32395,8 @@
             </p:pic>
           </mc:Fallback>
         </mc:AlternateContent>
-        <mc:AlternateContent xmlns:mc="http://schemas.openxmlformats.org/markup-compatibility/2006">
-          <mc:Choice xmlns:p14="http://schemas.microsoft.com/office/powerpoint/2010/main" Requires="p14">
+        <mc:AlternateContent xmlns:mc="http://schemas.openxmlformats.org/markup-compatibility/2006" xmlns:p14="http://schemas.microsoft.com/office/powerpoint/2010/main">
+          <mc:Choice Requires="p14">
             <p:contentPart p14:bwMode="auto" r:id="rId144">
               <p14:nvContentPartPr>
                 <p14:cNvPr id="99" name="墨迹 98">
@@ -32415,7 +32415,7 @@
               </p14:xfrm>
             </p:contentPart>
           </mc:Choice>
-          <mc:Fallback>
+          <mc:Fallback xmlns="">
             <p:pic>
               <p:nvPicPr>
                 <p:cNvPr id="99" name="墨迹 98">
@@ -32446,8 +32446,8 @@
             </p:pic>
           </mc:Fallback>
         </mc:AlternateContent>
-        <mc:AlternateContent xmlns:mc="http://schemas.openxmlformats.org/markup-compatibility/2006">
-          <mc:Choice xmlns:p14="http://schemas.microsoft.com/office/powerpoint/2010/main" Requires="p14">
+        <mc:AlternateContent xmlns:mc="http://schemas.openxmlformats.org/markup-compatibility/2006" xmlns:p14="http://schemas.microsoft.com/office/powerpoint/2010/main">
+          <mc:Choice Requires="p14">
             <p:contentPart p14:bwMode="auto" r:id="rId146">
               <p14:nvContentPartPr>
                 <p14:cNvPr id="100" name="墨迹 99">
@@ -32466,7 +32466,7 @@
               </p14:xfrm>
             </p:contentPart>
           </mc:Choice>
-          <mc:Fallback>
+          <mc:Fallback xmlns="">
             <p:pic>
               <p:nvPicPr>
                 <p:cNvPr id="100" name="墨迹 99">
@@ -32497,8 +32497,8 @@
             </p:pic>
           </mc:Fallback>
         </mc:AlternateContent>
-        <mc:AlternateContent xmlns:mc="http://schemas.openxmlformats.org/markup-compatibility/2006">
-          <mc:Choice xmlns:p14="http://schemas.microsoft.com/office/powerpoint/2010/main" Requires="p14">
+        <mc:AlternateContent xmlns:mc="http://schemas.openxmlformats.org/markup-compatibility/2006" xmlns:p14="http://schemas.microsoft.com/office/powerpoint/2010/main">
+          <mc:Choice Requires="p14">
             <p:contentPart p14:bwMode="auto" r:id="rId148">
               <p14:nvContentPartPr>
                 <p14:cNvPr id="101" name="墨迹 100">
@@ -32517,7 +32517,7 @@
               </p14:xfrm>
             </p:contentPart>
           </mc:Choice>
-          <mc:Fallback>
+          <mc:Fallback xmlns="">
             <p:pic>
               <p:nvPicPr>
                 <p:cNvPr id="101" name="墨迹 100">
@@ -32548,8 +32548,8 @@
             </p:pic>
           </mc:Fallback>
         </mc:AlternateContent>
-        <mc:AlternateContent xmlns:mc="http://schemas.openxmlformats.org/markup-compatibility/2006">
-          <mc:Choice xmlns:p14="http://schemas.microsoft.com/office/powerpoint/2010/main" Requires="p14">
+        <mc:AlternateContent xmlns:mc="http://schemas.openxmlformats.org/markup-compatibility/2006" xmlns:p14="http://schemas.microsoft.com/office/powerpoint/2010/main">
+          <mc:Choice Requires="p14">
             <p:contentPart p14:bwMode="auto" r:id="rId150">
               <p14:nvContentPartPr>
                 <p14:cNvPr id="103" name="墨迹 102">
@@ -32568,7 +32568,7 @@
               </p14:xfrm>
             </p:contentPart>
           </mc:Choice>
-          <mc:Fallback>
+          <mc:Fallback xmlns="">
             <p:pic>
               <p:nvPicPr>
                 <p:cNvPr id="103" name="墨迹 102">
@@ -32599,8 +32599,8 @@
             </p:pic>
           </mc:Fallback>
         </mc:AlternateContent>
-        <mc:AlternateContent xmlns:mc="http://schemas.openxmlformats.org/markup-compatibility/2006">
-          <mc:Choice xmlns:p14="http://schemas.microsoft.com/office/powerpoint/2010/main" Requires="p14">
+        <mc:AlternateContent xmlns:mc="http://schemas.openxmlformats.org/markup-compatibility/2006" xmlns:p14="http://schemas.microsoft.com/office/powerpoint/2010/main">
+          <mc:Choice Requires="p14">
             <p:contentPart p14:bwMode="auto" r:id="rId152">
               <p14:nvContentPartPr>
                 <p14:cNvPr id="104" name="墨迹 103">
@@ -32619,7 +32619,7 @@
               </p14:xfrm>
             </p:contentPart>
           </mc:Choice>
-          <mc:Fallback>
+          <mc:Fallback xmlns="">
             <p:pic>
               <p:nvPicPr>
                 <p:cNvPr id="104" name="墨迹 103">
@@ -32650,8 +32650,8 @@
             </p:pic>
           </mc:Fallback>
         </mc:AlternateContent>
-        <mc:AlternateContent xmlns:mc="http://schemas.openxmlformats.org/markup-compatibility/2006">
-          <mc:Choice xmlns:p14="http://schemas.microsoft.com/office/powerpoint/2010/main" Requires="p14">
+        <mc:AlternateContent xmlns:mc="http://schemas.openxmlformats.org/markup-compatibility/2006" xmlns:p14="http://schemas.microsoft.com/office/powerpoint/2010/main">
+          <mc:Choice Requires="p14">
             <p:contentPart p14:bwMode="auto" r:id="rId154">
               <p14:nvContentPartPr>
                 <p14:cNvPr id="105" name="墨迹 104">
@@ -32670,7 +32670,7 @@
               </p14:xfrm>
             </p:contentPart>
           </mc:Choice>
-          <mc:Fallback>
+          <mc:Fallback xmlns="">
             <p:pic>
               <p:nvPicPr>
                 <p:cNvPr id="105" name="墨迹 104">
@@ -32722,8 +32722,8 @@
             <a:chExt cx="1223640" cy="774360"/>
           </a:xfrm>
         </p:grpSpPr>
-        <mc:AlternateContent xmlns:mc="http://schemas.openxmlformats.org/markup-compatibility/2006">
-          <mc:Choice xmlns:p14="http://schemas.microsoft.com/office/powerpoint/2010/main" Requires="p14">
+        <mc:AlternateContent xmlns:mc="http://schemas.openxmlformats.org/markup-compatibility/2006" xmlns:p14="http://schemas.microsoft.com/office/powerpoint/2010/main">
+          <mc:Choice Requires="p14">
             <p:contentPart p14:bwMode="auto" r:id="rId156">
               <p14:nvContentPartPr>
                 <p14:cNvPr id="106" name="墨迹 105">
@@ -32742,7 +32742,7 @@
               </p14:xfrm>
             </p:contentPart>
           </mc:Choice>
-          <mc:Fallback>
+          <mc:Fallback xmlns="">
             <p:pic>
               <p:nvPicPr>
                 <p:cNvPr id="106" name="墨迹 105">
@@ -32773,8 +32773,8 @@
             </p:pic>
           </mc:Fallback>
         </mc:AlternateContent>
-        <mc:AlternateContent xmlns:mc="http://schemas.openxmlformats.org/markup-compatibility/2006">
-          <mc:Choice xmlns:p14="http://schemas.microsoft.com/office/powerpoint/2010/main" Requires="p14">
+        <mc:AlternateContent xmlns:mc="http://schemas.openxmlformats.org/markup-compatibility/2006" xmlns:p14="http://schemas.microsoft.com/office/powerpoint/2010/main">
+          <mc:Choice Requires="p14">
             <p:contentPart p14:bwMode="auto" r:id="rId158">
               <p14:nvContentPartPr>
                 <p14:cNvPr id="107" name="墨迹 106">
@@ -32793,7 +32793,7 @@
               </p14:xfrm>
             </p:contentPart>
           </mc:Choice>
-          <mc:Fallback>
+          <mc:Fallback xmlns="">
             <p:pic>
               <p:nvPicPr>
                 <p:cNvPr id="107" name="墨迹 106">
@@ -32824,8 +32824,8 @@
             </p:pic>
           </mc:Fallback>
         </mc:AlternateContent>
-        <mc:AlternateContent xmlns:mc="http://schemas.openxmlformats.org/markup-compatibility/2006">
-          <mc:Choice xmlns:p14="http://schemas.microsoft.com/office/powerpoint/2010/main" Requires="p14">
+        <mc:AlternateContent xmlns:mc="http://schemas.openxmlformats.org/markup-compatibility/2006" xmlns:p14="http://schemas.microsoft.com/office/powerpoint/2010/main">
+          <mc:Choice Requires="p14">
             <p:contentPart p14:bwMode="auto" r:id="rId160">
               <p14:nvContentPartPr>
                 <p14:cNvPr id="108" name="墨迹 107">
@@ -32844,7 +32844,7 @@
               </p14:xfrm>
             </p:contentPart>
           </mc:Choice>
-          <mc:Fallback>
+          <mc:Fallback xmlns="">
             <p:pic>
               <p:nvPicPr>
                 <p:cNvPr id="108" name="墨迹 107">
@@ -32875,8 +32875,8 @@
             </p:pic>
           </mc:Fallback>
         </mc:AlternateContent>
-        <mc:AlternateContent xmlns:mc="http://schemas.openxmlformats.org/markup-compatibility/2006">
-          <mc:Choice xmlns:p14="http://schemas.microsoft.com/office/powerpoint/2010/main" Requires="p14">
+        <mc:AlternateContent xmlns:mc="http://schemas.openxmlformats.org/markup-compatibility/2006" xmlns:p14="http://schemas.microsoft.com/office/powerpoint/2010/main">
+          <mc:Choice Requires="p14">
             <p:contentPart p14:bwMode="auto" r:id="rId162">
               <p14:nvContentPartPr>
                 <p14:cNvPr id="109" name="墨迹 108">
@@ -32895,7 +32895,7 @@
               </p14:xfrm>
             </p:contentPart>
           </mc:Choice>
-          <mc:Fallback>
+          <mc:Fallback xmlns="">
             <p:pic>
               <p:nvPicPr>
                 <p:cNvPr id="109" name="墨迹 108">
@@ -32926,8 +32926,8 @@
             </p:pic>
           </mc:Fallback>
         </mc:AlternateContent>
-        <mc:AlternateContent xmlns:mc="http://schemas.openxmlformats.org/markup-compatibility/2006">
-          <mc:Choice xmlns:p14="http://schemas.microsoft.com/office/powerpoint/2010/main" Requires="p14">
+        <mc:AlternateContent xmlns:mc="http://schemas.openxmlformats.org/markup-compatibility/2006" xmlns:p14="http://schemas.microsoft.com/office/powerpoint/2010/main">
+          <mc:Choice Requires="p14">
             <p:contentPart p14:bwMode="auto" r:id="rId164">
               <p14:nvContentPartPr>
                 <p14:cNvPr id="110" name="墨迹 109">
@@ -32946,7 +32946,7 @@
               </p14:xfrm>
             </p:contentPart>
           </mc:Choice>
-          <mc:Fallback>
+          <mc:Fallback xmlns="">
             <p:pic>
               <p:nvPicPr>
                 <p:cNvPr id="110" name="墨迹 109">
@@ -32977,8 +32977,8 @@
             </p:pic>
           </mc:Fallback>
         </mc:AlternateContent>
-        <mc:AlternateContent xmlns:mc="http://schemas.openxmlformats.org/markup-compatibility/2006">
-          <mc:Choice xmlns:p14="http://schemas.microsoft.com/office/powerpoint/2010/main" Requires="p14">
+        <mc:AlternateContent xmlns:mc="http://schemas.openxmlformats.org/markup-compatibility/2006" xmlns:p14="http://schemas.microsoft.com/office/powerpoint/2010/main">
+          <mc:Choice Requires="p14">
             <p:contentPart p14:bwMode="auto" r:id="rId166">
               <p14:nvContentPartPr>
                 <p14:cNvPr id="111" name="墨迹 110">
@@ -32997,7 +32997,7 @@
               </p14:xfrm>
             </p:contentPart>
           </mc:Choice>
-          <mc:Fallback>
+          <mc:Fallback xmlns="">
             <p:pic>
               <p:nvPicPr>
                 <p:cNvPr id="111" name="墨迹 110">
@@ -33028,8 +33028,8 @@
             </p:pic>
           </mc:Fallback>
         </mc:AlternateContent>
-        <mc:AlternateContent xmlns:mc="http://schemas.openxmlformats.org/markup-compatibility/2006">
-          <mc:Choice xmlns:p14="http://schemas.microsoft.com/office/powerpoint/2010/main" Requires="p14">
+        <mc:AlternateContent xmlns:mc="http://schemas.openxmlformats.org/markup-compatibility/2006" xmlns:p14="http://schemas.microsoft.com/office/powerpoint/2010/main">
+          <mc:Choice Requires="p14">
             <p:contentPart p14:bwMode="auto" r:id="rId168">
               <p14:nvContentPartPr>
                 <p14:cNvPr id="112" name="墨迹 111">
@@ -33048,7 +33048,7 @@
               </p14:xfrm>
             </p:contentPart>
           </mc:Choice>
-          <mc:Fallback>
+          <mc:Fallback xmlns="">
             <p:pic>
               <p:nvPicPr>
                 <p:cNvPr id="112" name="墨迹 111">
@@ -33079,8 +33079,8 @@
             </p:pic>
           </mc:Fallback>
         </mc:AlternateContent>
-        <mc:AlternateContent xmlns:mc="http://schemas.openxmlformats.org/markup-compatibility/2006">
-          <mc:Choice xmlns:p14="http://schemas.microsoft.com/office/powerpoint/2010/main" Requires="p14">
+        <mc:AlternateContent xmlns:mc="http://schemas.openxmlformats.org/markup-compatibility/2006" xmlns:p14="http://schemas.microsoft.com/office/powerpoint/2010/main">
+          <mc:Choice Requires="p14">
             <p:contentPart p14:bwMode="auto" r:id="rId170">
               <p14:nvContentPartPr>
                 <p14:cNvPr id="113" name="墨迹 112">
@@ -33099,7 +33099,7 @@
               </p14:xfrm>
             </p:contentPart>
           </mc:Choice>
-          <mc:Fallback>
+          <mc:Fallback xmlns="">
             <p:pic>
               <p:nvPicPr>
                 <p:cNvPr id="113" name="墨迹 112">
@@ -33130,8 +33130,8 @@
             </p:pic>
           </mc:Fallback>
         </mc:AlternateContent>
-        <mc:AlternateContent xmlns:mc="http://schemas.openxmlformats.org/markup-compatibility/2006">
-          <mc:Choice xmlns:p14="http://schemas.microsoft.com/office/powerpoint/2010/main" Requires="p14">
+        <mc:AlternateContent xmlns:mc="http://schemas.openxmlformats.org/markup-compatibility/2006" xmlns:p14="http://schemas.microsoft.com/office/powerpoint/2010/main">
+          <mc:Choice Requires="p14">
             <p:contentPart p14:bwMode="auto" r:id="rId172">
               <p14:nvContentPartPr>
                 <p14:cNvPr id="114" name="墨迹 113">
@@ -33150,7 +33150,7 @@
               </p14:xfrm>
             </p:contentPart>
           </mc:Choice>
-          <mc:Fallback>
+          <mc:Fallback xmlns="">
             <p:pic>
               <p:nvPicPr>
                 <p:cNvPr id="114" name="墨迹 113">
@@ -33181,8 +33181,8 @@
             </p:pic>
           </mc:Fallback>
         </mc:AlternateContent>
-        <mc:AlternateContent xmlns:mc="http://schemas.openxmlformats.org/markup-compatibility/2006">
-          <mc:Choice xmlns:p14="http://schemas.microsoft.com/office/powerpoint/2010/main" Requires="p14">
+        <mc:AlternateContent xmlns:mc="http://schemas.openxmlformats.org/markup-compatibility/2006" xmlns:p14="http://schemas.microsoft.com/office/powerpoint/2010/main">
+          <mc:Choice Requires="p14">
             <p:contentPart p14:bwMode="auto" r:id="rId174">
               <p14:nvContentPartPr>
                 <p14:cNvPr id="115" name="墨迹 114">
@@ -33201,7 +33201,7 @@
               </p14:xfrm>
             </p:contentPart>
           </mc:Choice>
-          <mc:Fallback>
+          <mc:Fallback xmlns="">
             <p:pic>
               <p:nvPicPr>
                 <p:cNvPr id="115" name="墨迹 114">
@@ -33232,8 +33232,8 @@
             </p:pic>
           </mc:Fallback>
         </mc:AlternateContent>
-        <mc:AlternateContent xmlns:mc="http://schemas.openxmlformats.org/markup-compatibility/2006">
-          <mc:Choice xmlns:p14="http://schemas.microsoft.com/office/powerpoint/2010/main" Requires="p14">
+        <mc:AlternateContent xmlns:mc="http://schemas.openxmlformats.org/markup-compatibility/2006" xmlns:p14="http://schemas.microsoft.com/office/powerpoint/2010/main">
+          <mc:Choice Requires="p14">
             <p:contentPart p14:bwMode="auto" r:id="rId176">
               <p14:nvContentPartPr>
                 <p14:cNvPr id="116" name="墨迹 115">
@@ -33252,7 +33252,7 @@
               </p14:xfrm>
             </p:contentPart>
           </mc:Choice>
-          <mc:Fallback>
+          <mc:Fallback xmlns="">
             <p:pic>
               <p:nvPicPr>
                 <p:cNvPr id="116" name="墨迹 115">
@@ -33283,8 +33283,8 @@
             </p:pic>
           </mc:Fallback>
         </mc:AlternateContent>
-        <mc:AlternateContent xmlns:mc="http://schemas.openxmlformats.org/markup-compatibility/2006">
-          <mc:Choice xmlns:p14="http://schemas.microsoft.com/office/powerpoint/2010/main" Requires="p14">
+        <mc:AlternateContent xmlns:mc="http://schemas.openxmlformats.org/markup-compatibility/2006" xmlns:p14="http://schemas.microsoft.com/office/powerpoint/2010/main">
+          <mc:Choice Requires="p14">
             <p:contentPart p14:bwMode="auto" r:id="rId178">
               <p14:nvContentPartPr>
                 <p14:cNvPr id="117" name="墨迹 116">
@@ -33303,7 +33303,7 @@
               </p14:xfrm>
             </p:contentPart>
           </mc:Choice>
-          <mc:Fallback>
+          <mc:Fallback xmlns="">
             <p:pic>
               <p:nvPicPr>
                 <p:cNvPr id="117" name="墨迹 116">
@@ -33355,8 +33355,8 @@
             <a:chExt cx="958680" cy="845640"/>
           </a:xfrm>
         </p:grpSpPr>
-        <mc:AlternateContent xmlns:mc="http://schemas.openxmlformats.org/markup-compatibility/2006">
-          <mc:Choice xmlns:p14="http://schemas.microsoft.com/office/powerpoint/2010/main" Requires="p14">
+        <mc:AlternateContent xmlns:mc="http://schemas.openxmlformats.org/markup-compatibility/2006" xmlns:p14="http://schemas.microsoft.com/office/powerpoint/2010/main">
+          <mc:Choice Requires="p14">
             <p:contentPart p14:bwMode="auto" r:id="rId180">
               <p14:nvContentPartPr>
                 <p14:cNvPr id="118" name="墨迹 117">
@@ -33375,7 +33375,7 @@
               </p14:xfrm>
             </p:contentPart>
           </mc:Choice>
-          <mc:Fallback>
+          <mc:Fallback xmlns="">
             <p:pic>
               <p:nvPicPr>
                 <p:cNvPr id="118" name="墨迹 117">
@@ -33406,8 +33406,8 @@
             </p:pic>
           </mc:Fallback>
         </mc:AlternateContent>
-        <mc:AlternateContent xmlns:mc="http://schemas.openxmlformats.org/markup-compatibility/2006">
-          <mc:Choice xmlns:p14="http://schemas.microsoft.com/office/powerpoint/2010/main" Requires="p14">
+        <mc:AlternateContent xmlns:mc="http://schemas.openxmlformats.org/markup-compatibility/2006" xmlns:p14="http://schemas.microsoft.com/office/powerpoint/2010/main">
+          <mc:Choice Requires="p14">
             <p:contentPart p14:bwMode="auto" r:id="rId182">
               <p14:nvContentPartPr>
                 <p14:cNvPr id="119" name="墨迹 118">
@@ -33426,7 +33426,7 @@
               </p14:xfrm>
             </p:contentPart>
           </mc:Choice>
-          <mc:Fallback>
+          <mc:Fallback xmlns="">
             <p:pic>
               <p:nvPicPr>
                 <p:cNvPr id="119" name="墨迹 118">
@@ -33457,8 +33457,8 @@
             </p:pic>
           </mc:Fallback>
         </mc:AlternateContent>
-        <mc:AlternateContent xmlns:mc="http://schemas.openxmlformats.org/markup-compatibility/2006">
-          <mc:Choice xmlns:p14="http://schemas.microsoft.com/office/powerpoint/2010/main" Requires="p14">
+        <mc:AlternateContent xmlns:mc="http://schemas.openxmlformats.org/markup-compatibility/2006" xmlns:p14="http://schemas.microsoft.com/office/powerpoint/2010/main">
+          <mc:Choice Requires="p14">
             <p:contentPart p14:bwMode="auto" r:id="rId184">
               <p14:nvContentPartPr>
                 <p14:cNvPr id="120" name="墨迹 119">
@@ -33477,7 +33477,7 @@
               </p14:xfrm>
             </p:contentPart>
           </mc:Choice>
-          <mc:Fallback>
+          <mc:Fallback xmlns="">
             <p:pic>
               <p:nvPicPr>
                 <p:cNvPr id="120" name="墨迹 119">
@@ -33508,8 +33508,8 @@
             </p:pic>
           </mc:Fallback>
         </mc:AlternateContent>
-        <mc:AlternateContent xmlns:mc="http://schemas.openxmlformats.org/markup-compatibility/2006">
-          <mc:Choice xmlns:p14="http://schemas.microsoft.com/office/powerpoint/2010/main" Requires="p14">
+        <mc:AlternateContent xmlns:mc="http://schemas.openxmlformats.org/markup-compatibility/2006" xmlns:p14="http://schemas.microsoft.com/office/powerpoint/2010/main">
+          <mc:Choice Requires="p14">
             <p:contentPart p14:bwMode="auto" r:id="rId186">
               <p14:nvContentPartPr>
                 <p14:cNvPr id="121" name="墨迹 120">
@@ -33528,7 +33528,7 @@
               </p14:xfrm>
             </p:contentPart>
           </mc:Choice>
-          <mc:Fallback>
+          <mc:Fallback xmlns="">
             <p:pic>
               <p:nvPicPr>
                 <p:cNvPr id="121" name="墨迹 120">
@@ -33559,8 +33559,8 @@
             </p:pic>
           </mc:Fallback>
         </mc:AlternateContent>
-        <mc:AlternateContent xmlns:mc="http://schemas.openxmlformats.org/markup-compatibility/2006">
-          <mc:Choice xmlns:p14="http://schemas.microsoft.com/office/powerpoint/2010/main" Requires="p14">
+        <mc:AlternateContent xmlns:mc="http://schemas.openxmlformats.org/markup-compatibility/2006" xmlns:p14="http://schemas.microsoft.com/office/powerpoint/2010/main">
+          <mc:Choice Requires="p14">
             <p:contentPart p14:bwMode="auto" r:id="rId188">
               <p14:nvContentPartPr>
                 <p14:cNvPr id="122" name="墨迹 121">
@@ -33579,7 +33579,7 @@
               </p14:xfrm>
             </p:contentPart>
           </mc:Choice>
-          <mc:Fallback>
+          <mc:Fallback xmlns="">
             <p:pic>
               <p:nvPicPr>
                 <p:cNvPr id="122" name="墨迹 121">
@@ -33610,8 +33610,8 @@
             </p:pic>
           </mc:Fallback>
         </mc:AlternateContent>
-        <mc:AlternateContent xmlns:mc="http://schemas.openxmlformats.org/markup-compatibility/2006">
-          <mc:Choice xmlns:p14="http://schemas.microsoft.com/office/powerpoint/2010/main" Requires="p14">
+        <mc:AlternateContent xmlns:mc="http://schemas.openxmlformats.org/markup-compatibility/2006" xmlns:p14="http://schemas.microsoft.com/office/powerpoint/2010/main">
+          <mc:Choice Requires="p14">
             <p:contentPart p14:bwMode="auto" r:id="rId190">
               <p14:nvContentPartPr>
                 <p14:cNvPr id="123" name="墨迹 122">
@@ -33630,7 +33630,7 @@
               </p14:xfrm>
             </p:contentPart>
           </mc:Choice>
-          <mc:Fallback>
+          <mc:Fallback xmlns="">
             <p:pic>
               <p:nvPicPr>
                 <p:cNvPr id="123" name="墨迹 122">
@@ -33661,8 +33661,8 @@
             </p:pic>
           </mc:Fallback>
         </mc:AlternateContent>
-        <mc:AlternateContent xmlns:mc="http://schemas.openxmlformats.org/markup-compatibility/2006">
-          <mc:Choice xmlns:p14="http://schemas.microsoft.com/office/powerpoint/2010/main" Requires="p14">
+        <mc:AlternateContent xmlns:mc="http://schemas.openxmlformats.org/markup-compatibility/2006" xmlns:p14="http://schemas.microsoft.com/office/powerpoint/2010/main">
+          <mc:Choice Requires="p14">
             <p:contentPart p14:bwMode="auto" r:id="rId192">
               <p14:nvContentPartPr>
                 <p14:cNvPr id="124" name="墨迹 123">
@@ -33681,7 +33681,7 @@
               </p14:xfrm>
             </p:contentPart>
           </mc:Choice>
-          <mc:Fallback>
+          <mc:Fallback xmlns="">
             <p:pic>
               <p:nvPicPr>
                 <p:cNvPr id="124" name="墨迹 123">
@@ -33712,8 +33712,8 @@
             </p:pic>
           </mc:Fallback>
         </mc:AlternateContent>
-        <mc:AlternateContent xmlns:mc="http://schemas.openxmlformats.org/markup-compatibility/2006">
-          <mc:Choice xmlns:p14="http://schemas.microsoft.com/office/powerpoint/2010/main" Requires="p14">
+        <mc:AlternateContent xmlns:mc="http://schemas.openxmlformats.org/markup-compatibility/2006" xmlns:p14="http://schemas.microsoft.com/office/powerpoint/2010/main">
+          <mc:Choice Requires="p14">
             <p:contentPart p14:bwMode="auto" r:id="rId194">
               <p14:nvContentPartPr>
                 <p14:cNvPr id="125" name="墨迹 124">
@@ -33732,7 +33732,7 @@
               </p14:xfrm>
             </p:contentPart>
           </mc:Choice>
-          <mc:Fallback>
+          <mc:Fallback xmlns="">
             <p:pic>
               <p:nvPicPr>
                 <p:cNvPr id="125" name="墨迹 124">
@@ -33763,8 +33763,8 @@
             </p:pic>
           </mc:Fallback>
         </mc:AlternateContent>
-        <mc:AlternateContent xmlns:mc="http://schemas.openxmlformats.org/markup-compatibility/2006">
-          <mc:Choice xmlns:p14="http://schemas.microsoft.com/office/powerpoint/2010/main" Requires="p14">
+        <mc:AlternateContent xmlns:mc="http://schemas.openxmlformats.org/markup-compatibility/2006" xmlns:p14="http://schemas.microsoft.com/office/powerpoint/2010/main">
+          <mc:Choice Requires="p14">
             <p:contentPart p14:bwMode="auto" r:id="rId196">
               <p14:nvContentPartPr>
                 <p14:cNvPr id="126" name="墨迹 125">
@@ -33783,7 +33783,7 @@
               </p14:xfrm>
             </p:contentPart>
           </mc:Choice>
-          <mc:Fallback>
+          <mc:Fallback xmlns="">
             <p:pic>
               <p:nvPicPr>
                 <p:cNvPr id="126" name="墨迹 125">
@@ -33814,8 +33814,8 @@
             </p:pic>
           </mc:Fallback>
         </mc:AlternateContent>
-        <mc:AlternateContent xmlns:mc="http://schemas.openxmlformats.org/markup-compatibility/2006">
-          <mc:Choice xmlns:p14="http://schemas.microsoft.com/office/powerpoint/2010/main" Requires="p14">
+        <mc:AlternateContent xmlns:mc="http://schemas.openxmlformats.org/markup-compatibility/2006" xmlns:p14="http://schemas.microsoft.com/office/powerpoint/2010/main">
+          <mc:Choice Requires="p14">
             <p:contentPart p14:bwMode="auto" r:id="rId198">
               <p14:nvContentPartPr>
                 <p14:cNvPr id="127" name="墨迹 126">
@@ -33834,7 +33834,7 @@
               </p14:xfrm>
             </p:contentPart>
           </mc:Choice>
-          <mc:Fallback>
+          <mc:Fallback xmlns="">
             <p:pic>
               <p:nvPicPr>
                 <p:cNvPr id="127" name="墨迹 126">
@@ -33886,8 +33886,8 @@
             <a:chExt cx="2614680" cy="915120"/>
           </a:xfrm>
         </p:grpSpPr>
-        <mc:AlternateContent xmlns:mc="http://schemas.openxmlformats.org/markup-compatibility/2006">
-          <mc:Choice xmlns:p14="http://schemas.microsoft.com/office/powerpoint/2010/main" Requires="p14">
+        <mc:AlternateContent xmlns:mc="http://schemas.openxmlformats.org/markup-compatibility/2006" xmlns:p14="http://schemas.microsoft.com/office/powerpoint/2010/main">
+          <mc:Choice Requires="p14">
             <p:contentPart p14:bwMode="auto" r:id="rId200">
               <p14:nvContentPartPr>
                 <p14:cNvPr id="131" name="墨迹 130">
@@ -33906,7 +33906,7 @@
               </p14:xfrm>
             </p:contentPart>
           </mc:Choice>
-          <mc:Fallback>
+          <mc:Fallback xmlns="">
             <p:pic>
               <p:nvPicPr>
                 <p:cNvPr id="131" name="墨迹 130">
@@ -33937,8 +33937,8 @@
             </p:pic>
           </mc:Fallback>
         </mc:AlternateContent>
-        <mc:AlternateContent xmlns:mc="http://schemas.openxmlformats.org/markup-compatibility/2006">
-          <mc:Choice xmlns:p14="http://schemas.microsoft.com/office/powerpoint/2010/main" Requires="p14">
+        <mc:AlternateContent xmlns:mc="http://schemas.openxmlformats.org/markup-compatibility/2006" xmlns:p14="http://schemas.microsoft.com/office/powerpoint/2010/main">
+          <mc:Choice Requires="p14">
             <p:contentPart p14:bwMode="auto" r:id="rId202">
               <p14:nvContentPartPr>
                 <p14:cNvPr id="132" name="墨迹 131">
@@ -33957,7 +33957,7 @@
               </p14:xfrm>
             </p:contentPart>
           </mc:Choice>
-          <mc:Fallback>
+          <mc:Fallback xmlns="">
             <p:pic>
               <p:nvPicPr>
                 <p:cNvPr id="132" name="墨迹 131">
@@ -33988,8 +33988,8 @@
             </p:pic>
           </mc:Fallback>
         </mc:AlternateContent>
-        <mc:AlternateContent xmlns:mc="http://schemas.openxmlformats.org/markup-compatibility/2006">
-          <mc:Choice xmlns:p14="http://schemas.microsoft.com/office/powerpoint/2010/main" Requires="p14">
+        <mc:AlternateContent xmlns:mc="http://schemas.openxmlformats.org/markup-compatibility/2006" xmlns:p14="http://schemas.microsoft.com/office/powerpoint/2010/main">
+          <mc:Choice Requires="p14">
             <p:contentPart p14:bwMode="auto" r:id="rId204">
               <p14:nvContentPartPr>
                 <p14:cNvPr id="133" name="墨迹 132">
@@ -34008,7 +34008,7 @@
               </p14:xfrm>
             </p:contentPart>
           </mc:Choice>
-          <mc:Fallback>
+          <mc:Fallback xmlns="">
             <p:pic>
               <p:nvPicPr>
                 <p:cNvPr id="133" name="墨迹 132">
@@ -34039,8 +34039,8 @@
             </p:pic>
           </mc:Fallback>
         </mc:AlternateContent>
-        <mc:AlternateContent xmlns:mc="http://schemas.openxmlformats.org/markup-compatibility/2006">
-          <mc:Choice xmlns:p14="http://schemas.microsoft.com/office/powerpoint/2010/main" Requires="p14">
+        <mc:AlternateContent xmlns:mc="http://schemas.openxmlformats.org/markup-compatibility/2006" xmlns:p14="http://schemas.microsoft.com/office/powerpoint/2010/main">
+          <mc:Choice Requires="p14">
             <p:contentPart p14:bwMode="auto" r:id="rId206">
               <p14:nvContentPartPr>
                 <p14:cNvPr id="134" name="墨迹 133">
@@ -34059,7 +34059,7 @@
               </p14:xfrm>
             </p:contentPart>
           </mc:Choice>
-          <mc:Fallback>
+          <mc:Fallback xmlns="">
             <p:pic>
               <p:nvPicPr>
                 <p:cNvPr id="134" name="墨迹 133">
@@ -34090,8 +34090,8 @@
             </p:pic>
           </mc:Fallback>
         </mc:AlternateContent>
-        <mc:AlternateContent xmlns:mc="http://schemas.openxmlformats.org/markup-compatibility/2006">
-          <mc:Choice xmlns:p14="http://schemas.microsoft.com/office/powerpoint/2010/main" Requires="p14">
+        <mc:AlternateContent xmlns:mc="http://schemas.openxmlformats.org/markup-compatibility/2006" xmlns:p14="http://schemas.microsoft.com/office/powerpoint/2010/main">
+          <mc:Choice Requires="p14">
             <p:contentPart p14:bwMode="auto" r:id="rId208">
               <p14:nvContentPartPr>
                 <p14:cNvPr id="135" name="墨迹 134">
@@ -34110,7 +34110,7 @@
               </p14:xfrm>
             </p:contentPart>
           </mc:Choice>
-          <mc:Fallback>
+          <mc:Fallback xmlns="">
             <p:pic>
               <p:nvPicPr>
                 <p:cNvPr id="135" name="墨迹 134">
@@ -34141,8 +34141,8 @@
             </p:pic>
           </mc:Fallback>
         </mc:AlternateContent>
-        <mc:AlternateContent xmlns:mc="http://schemas.openxmlformats.org/markup-compatibility/2006">
-          <mc:Choice xmlns:p14="http://schemas.microsoft.com/office/powerpoint/2010/main" Requires="p14">
+        <mc:AlternateContent xmlns:mc="http://schemas.openxmlformats.org/markup-compatibility/2006" xmlns:p14="http://schemas.microsoft.com/office/powerpoint/2010/main">
+          <mc:Choice Requires="p14">
             <p:contentPart p14:bwMode="auto" r:id="rId210">
               <p14:nvContentPartPr>
                 <p14:cNvPr id="136" name="墨迹 135">
@@ -34161,7 +34161,7 @@
               </p14:xfrm>
             </p:contentPart>
           </mc:Choice>
-          <mc:Fallback>
+          <mc:Fallback xmlns="">
             <p:pic>
               <p:nvPicPr>
                 <p:cNvPr id="136" name="墨迹 135">
@@ -34192,8 +34192,8 @@
             </p:pic>
           </mc:Fallback>
         </mc:AlternateContent>
-        <mc:AlternateContent xmlns:mc="http://schemas.openxmlformats.org/markup-compatibility/2006">
-          <mc:Choice xmlns:p14="http://schemas.microsoft.com/office/powerpoint/2010/main" Requires="p14">
+        <mc:AlternateContent xmlns:mc="http://schemas.openxmlformats.org/markup-compatibility/2006" xmlns:p14="http://schemas.microsoft.com/office/powerpoint/2010/main">
+          <mc:Choice Requires="p14">
             <p:contentPart p14:bwMode="auto" r:id="rId212">
               <p14:nvContentPartPr>
                 <p14:cNvPr id="137" name="墨迹 136">
@@ -34212,7 +34212,7 @@
               </p14:xfrm>
             </p:contentPart>
           </mc:Choice>
-          <mc:Fallback>
+          <mc:Fallback xmlns="">
             <p:pic>
               <p:nvPicPr>
                 <p:cNvPr id="137" name="墨迹 136">
@@ -34243,8 +34243,8 @@
             </p:pic>
           </mc:Fallback>
         </mc:AlternateContent>
-        <mc:AlternateContent xmlns:mc="http://schemas.openxmlformats.org/markup-compatibility/2006">
-          <mc:Choice xmlns:p14="http://schemas.microsoft.com/office/powerpoint/2010/main" Requires="p14">
+        <mc:AlternateContent xmlns:mc="http://schemas.openxmlformats.org/markup-compatibility/2006" xmlns:p14="http://schemas.microsoft.com/office/powerpoint/2010/main">
+          <mc:Choice Requires="p14">
             <p:contentPart p14:bwMode="auto" r:id="rId214">
               <p14:nvContentPartPr>
                 <p14:cNvPr id="138" name="墨迹 137">
@@ -34263,7 +34263,7 @@
               </p14:xfrm>
             </p:contentPart>
           </mc:Choice>
-          <mc:Fallback>
+          <mc:Fallback xmlns="">
             <p:pic>
               <p:nvPicPr>
                 <p:cNvPr id="138" name="墨迹 137">
@@ -34294,8 +34294,8 @@
             </p:pic>
           </mc:Fallback>
         </mc:AlternateContent>
-        <mc:AlternateContent xmlns:mc="http://schemas.openxmlformats.org/markup-compatibility/2006">
-          <mc:Choice xmlns:p14="http://schemas.microsoft.com/office/powerpoint/2010/main" Requires="p14">
+        <mc:AlternateContent xmlns:mc="http://schemas.openxmlformats.org/markup-compatibility/2006" xmlns:p14="http://schemas.microsoft.com/office/powerpoint/2010/main">
+          <mc:Choice Requires="p14">
             <p:contentPart p14:bwMode="auto" r:id="rId216">
               <p14:nvContentPartPr>
                 <p14:cNvPr id="139" name="墨迹 138">
@@ -34314,7 +34314,7 @@
               </p14:xfrm>
             </p:contentPart>
           </mc:Choice>
-          <mc:Fallback>
+          <mc:Fallback xmlns="">
             <p:pic>
               <p:nvPicPr>
                 <p:cNvPr id="139" name="墨迹 138">
@@ -34345,8 +34345,8 @@
             </p:pic>
           </mc:Fallback>
         </mc:AlternateContent>
-        <mc:AlternateContent xmlns:mc="http://schemas.openxmlformats.org/markup-compatibility/2006">
-          <mc:Choice xmlns:p14="http://schemas.microsoft.com/office/powerpoint/2010/main" Requires="p14">
+        <mc:AlternateContent xmlns:mc="http://schemas.openxmlformats.org/markup-compatibility/2006" xmlns:p14="http://schemas.microsoft.com/office/powerpoint/2010/main">
+          <mc:Choice Requires="p14">
             <p:contentPart p14:bwMode="auto" r:id="rId218">
               <p14:nvContentPartPr>
                 <p14:cNvPr id="140" name="墨迹 139">
@@ -34365,7 +34365,7 @@
               </p14:xfrm>
             </p:contentPart>
           </mc:Choice>
-          <mc:Fallback>
+          <mc:Fallback xmlns="">
             <p:pic>
               <p:nvPicPr>
                 <p:cNvPr id="140" name="墨迹 139">
@@ -34396,8 +34396,8 @@
             </p:pic>
           </mc:Fallback>
         </mc:AlternateContent>
-        <mc:AlternateContent xmlns:mc="http://schemas.openxmlformats.org/markup-compatibility/2006">
-          <mc:Choice xmlns:p14="http://schemas.microsoft.com/office/powerpoint/2010/main" Requires="p14">
+        <mc:AlternateContent xmlns:mc="http://schemas.openxmlformats.org/markup-compatibility/2006" xmlns:p14="http://schemas.microsoft.com/office/powerpoint/2010/main">
+          <mc:Choice Requires="p14">
             <p:contentPart p14:bwMode="auto" r:id="rId220">
               <p14:nvContentPartPr>
                 <p14:cNvPr id="141" name="墨迹 140">
@@ -34416,7 +34416,7 @@
               </p14:xfrm>
             </p:contentPart>
           </mc:Choice>
-          <mc:Fallback>
+          <mc:Fallback xmlns="">
             <p:pic>
               <p:nvPicPr>
                 <p:cNvPr id="141" name="墨迹 140">
@@ -34447,8 +34447,8 @@
             </p:pic>
           </mc:Fallback>
         </mc:AlternateContent>
-        <mc:AlternateContent xmlns:mc="http://schemas.openxmlformats.org/markup-compatibility/2006">
-          <mc:Choice xmlns:p14="http://schemas.microsoft.com/office/powerpoint/2010/main" Requires="p14">
+        <mc:AlternateContent xmlns:mc="http://schemas.openxmlformats.org/markup-compatibility/2006" xmlns:p14="http://schemas.microsoft.com/office/powerpoint/2010/main">
+          <mc:Choice Requires="p14">
             <p:contentPart p14:bwMode="auto" r:id="rId222">
               <p14:nvContentPartPr>
                 <p14:cNvPr id="142" name="墨迹 141">
@@ -34467,7 +34467,7 @@
               </p14:xfrm>
             </p:contentPart>
           </mc:Choice>
-          <mc:Fallback>
+          <mc:Fallback xmlns="">
             <p:pic>
               <p:nvPicPr>
                 <p:cNvPr id="142" name="墨迹 141">
@@ -34498,8 +34498,8 @@
             </p:pic>
           </mc:Fallback>
         </mc:AlternateContent>
-        <mc:AlternateContent xmlns:mc="http://schemas.openxmlformats.org/markup-compatibility/2006">
-          <mc:Choice xmlns:p14="http://schemas.microsoft.com/office/powerpoint/2010/main" Requires="p14">
+        <mc:AlternateContent xmlns:mc="http://schemas.openxmlformats.org/markup-compatibility/2006" xmlns:p14="http://schemas.microsoft.com/office/powerpoint/2010/main">
+          <mc:Choice Requires="p14">
             <p:contentPart p14:bwMode="auto" r:id="rId224">
               <p14:nvContentPartPr>
                 <p14:cNvPr id="143" name="墨迹 142">
@@ -34518,7 +34518,7 @@
               </p14:xfrm>
             </p:contentPart>
           </mc:Choice>
-          <mc:Fallback>
+          <mc:Fallback xmlns="">
             <p:pic>
               <p:nvPicPr>
                 <p:cNvPr id="143" name="墨迹 142">
@@ -34549,8 +34549,8 @@
             </p:pic>
           </mc:Fallback>
         </mc:AlternateContent>
-        <mc:AlternateContent xmlns:mc="http://schemas.openxmlformats.org/markup-compatibility/2006">
-          <mc:Choice xmlns:p14="http://schemas.microsoft.com/office/powerpoint/2010/main" Requires="p14">
+        <mc:AlternateContent xmlns:mc="http://schemas.openxmlformats.org/markup-compatibility/2006" xmlns:p14="http://schemas.microsoft.com/office/powerpoint/2010/main">
+          <mc:Choice Requires="p14">
             <p:contentPart p14:bwMode="auto" r:id="rId226">
               <p14:nvContentPartPr>
                 <p14:cNvPr id="144" name="墨迹 143">
@@ -34569,7 +34569,7 @@
               </p14:xfrm>
             </p:contentPart>
           </mc:Choice>
-          <mc:Fallback>
+          <mc:Fallback xmlns="">
             <p:pic>
               <p:nvPicPr>
                 <p:cNvPr id="144" name="墨迹 143">
@@ -34600,8 +34600,8 @@
             </p:pic>
           </mc:Fallback>
         </mc:AlternateContent>
-        <mc:AlternateContent xmlns:mc="http://schemas.openxmlformats.org/markup-compatibility/2006">
-          <mc:Choice xmlns:p14="http://schemas.microsoft.com/office/powerpoint/2010/main" Requires="p14">
+        <mc:AlternateContent xmlns:mc="http://schemas.openxmlformats.org/markup-compatibility/2006" xmlns:p14="http://schemas.microsoft.com/office/powerpoint/2010/main">
+          <mc:Choice Requires="p14">
             <p:contentPart p14:bwMode="auto" r:id="rId228">
               <p14:nvContentPartPr>
                 <p14:cNvPr id="145" name="墨迹 144">
@@ -34620,7 +34620,7 @@
               </p14:xfrm>
             </p:contentPart>
           </mc:Choice>
-          <mc:Fallback>
+          <mc:Fallback xmlns="">
             <p:pic>
               <p:nvPicPr>
                 <p:cNvPr id="145" name="墨迹 144">
@@ -34651,8 +34651,8 @@
             </p:pic>
           </mc:Fallback>
         </mc:AlternateContent>
-        <mc:AlternateContent xmlns:mc="http://schemas.openxmlformats.org/markup-compatibility/2006">
-          <mc:Choice xmlns:p14="http://schemas.microsoft.com/office/powerpoint/2010/main" Requires="p14">
+        <mc:AlternateContent xmlns:mc="http://schemas.openxmlformats.org/markup-compatibility/2006" xmlns:p14="http://schemas.microsoft.com/office/powerpoint/2010/main">
+          <mc:Choice Requires="p14">
             <p:contentPart p14:bwMode="auto" r:id="rId230">
               <p14:nvContentPartPr>
                 <p14:cNvPr id="146" name="墨迹 145">
@@ -34671,7 +34671,7 @@
               </p14:xfrm>
             </p:contentPart>
           </mc:Choice>
-          <mc:Fallback>
+          <mc:Fallback xmlns="">
             <p:pic>
               <p:nvPicPr>
                 <p:cNvPr id="146" name="墨迹 145">
@@ -34702,8 +34702,8 @@
             </p:pic>
           </mc:Fallback>
         </mc:AlternateContent>
-        <mc:AlternateContent xmlns:mc="http://schemas.openxmlformats.org/markup-compatibility/2006">
-          <mc:Choice xmlns:p14="http://schemas.microsoft.com/office/powerpoint/2010/main" Requires="p14">
+        <mc:AlternateContent xmlns:mc="http://schemas.openxmlformats.org/markup-compatibility/2006" xmlns:p14="http://schemas.microsoft.com/office/powerpoint/2010/main">
+          <mc:Choice Requires="p14">
             <p:contentPart p14:bwMode="auto" r:id="rId232">
               <p14:nvContentPartPr>
                 <p14:cNvPr id="147" name="墨迹 146">
@@ -34722,7 +34722,7 @@
               </p14:xfrm>
             </p:contentPart>
           </mc:Choice>
-          <mc:Fallback>
+          <mc:Fallback xmlns="">
             <p:pic>
               <p:nvPicPr>
                 <p:cNvPr id="147" name="墨迹 146">
@@ -34753,8 +34753,8 @@
             </p:pic>
           </mc:Fallback>
         </mc:AlternateContent>
-        <mc:AlternateContent xmlns:mc="http://schemas.openxmlformats.org/markup-compatibility/2006">
-          <mc:Choice xmlns:p14="http://schemas.microsoft.com/office/powerpoint/2010/main" Requires="p14">
+        <mc:AlternateContent xmlns:mc="http://schemas.openxmlformats.org/markup-compatibility/2006" xmlns:p14="http://schemas.microsoft.com/office/powerpoint/2010/main">
+          <mc:Choice Requires="p14">
             <p:contentPart p14:bwMode="auto" r:id="rId234">
               <p14:nvContentPartPr>
                 <p14:cNvPr id="148" name="墨迹 147">
@@ -34773,7 +34773,7 @@
               </p14:xfrm>
             </p:contentPart>
           </mc:Choice>
-          <mc:Fallback>
+          <mc:Fallback xmlns="">
             <p:pic>
               <p:nvPicPr>
                 <p:cNvPr id="148" name="墨迹 147">
@@ -34804,8 +34804,8 @@
             </p:pic>
           </mc:Fallback>
         </mc:AlternateContent>
-        <mc:AlternateContent xmlns:mc="http://schemas.openxmlformats.org/markup-compatibility/2006">
-          <mc:Choice xmlns:p14="http://schemas.microsoft.com/office/powerpoint/2010/main" Requires="p14">
+        <mc:AlternateContent xmlns:mc="http://schemas.openxmlformats.org/markup-compatibility/2006" xmlns:p14="http://schemas.microsoft.com/office/powerpoint/2010/main">
+          <mc:Choice Requires="p14">
             <p:contentPart p14:bwMode="auto" r:id="rId236">
               <p14:nvContentPartPr>
                 <p14:cNvPr id="149" name="墨迹 148">
@@ -34824,7 +34824,7 @@
               </p14:xfrm>
             </p:contentPart>
           </mc:Choice>
-          <mc:Fallback>
+          <mc:Fallback xmlns="">
             <p:pic>
               <p:nvPicPr>
                 <p:cNvPr id="149" name="墨迹 148">
@@ -34876,8 +34876,8 @@
             <a:chExt cx="725040" cy="533520"/>
           </a:xfrm>
         </p:grpSpPr>
-        <mc:AlternateContent xmlns:mc="http://schemas.openxmlformats.org/markup-compatibility/2006">
-          <mc:Choice xmlns:p14="http://schemas.microsoft.com/office/powerpoint/2010/main" Requires="p14">
+        <mc:AlternateContent xmlns:mc="http://schemas.openxmlformats.org/markup-compatibility/2006" xmlns:p14="http://schemas.microsoft.com/office/powerpoint/2010/main">
+          <mc:Choice Requires="p14">
             <p:contentPart p14:bwMode="auto" r:id="rId238">
               <p14:nvContentPartPr>
                 <p14:cNvPr id="150" name="墨迹 149">
@@ -34896,7 +34896,7 @@
               </p14:xfrm>
             </p:contentPart>
           </mc:Choice>
-          <mc:Fallback>
+          <mc:Fallback xmlns="">
             <p:pic>
               <p:nvPicPr>
                 <p:cNvPr id="150" name="墨迹 149">
@@ -34927,8 +34927,8 @@
             </p:pic>
           </mc:Fallback>
         </mc:AlternateContent>
-        <mc:AlternateContent xmlns:mc="http://schemas.openxmlformats.org/markup-compatibility/2006">
-          <mc:Choice xmlns:p14="http://schemas.microsoft.com/office/powerpoint/2010/main" Requires="p14">
+        <mc:AlternateContent xmlns:mc="http://schemas.openxmlformats.org/markup-compatibility/2006" xmlns:p14="http://schemas.microsoft.com/office/powerpoint/2010/main">
+          <mc:Choice Requires="p14">
             <p:contentPart p14:bwMode="auto" r:id="rId240">
               <p14:nvContentPartPr>
                 <p14:cNvPr id="151" name="墨迹 150">
@@ -34947,7 +34947,7 @@
               </p14:xfrm>
             </p:contentPart>
           </mc:Choice>
-          <mc:Fallback>
+          <mc:Fallback xmlns="">
             <p:pic>
               <p:nvPicPr>
                 <p:cNvPr id="151" name="墨迹 150">
@@ -34978,8 +34978,8 @@
             </p:pic>
           </mc:Fallback>
         </mc:AlternateContent>
-        <mc:AlternateContent xmlns:mc="http://schemas.openxmlformats.org/markup-compatibility/2006">
-          <mc:Choice xmlns:p14="http://schemas.microsoft.com/office/powerpoint/2010/main" Requires="p14">
+        <mc:AlternateContent xmlns:mc="http://schemas.openxmlformats.org/markup-compatibility/2006" xmlns:p14="http://schemas.microsoft.com/office/powerpoint/2010/main">
+          <mc:Choice Requires="p14">
             <p:contentPart p14:bwMode="auto" r:id="rId242">
               <p14:nvContentPartPr>
                 <p14:cNvPr id="152" name="墨迹 151">
@@ -34998,7 +34998,7 @@
               </p14:xfrm>
             </p:contentPart>
           </mc:Choice>
-          <mc:Fallback>
+          <mc:Fallback xmlns="">
             <p:pic>
               <p:nvPicPr>
                 <p:cNvPr id="152" name="墨迹 151">
@@ -35029,8 +35029,8 @@
             </p:pic>
           </mc:Fallback>
         </mc:AlternateContent>
-        <mc:AlternateContent xmlns:mc="http://schemas.openxmlformats.org/markup-compatibility/2006">
-          <mc:Choice xmlns:p14="http://schemas.microsoft.com/office/powerpoint/2010/main" Requires="p14">
+        <mc:AlternateContent xmlns:mc="http://schemas.openxmlformats.org/markup-compatibility/2006" xmlns:p14="http://schemas.microsoft.com/office/powerpoint/2010/main">
+          <mc:Choice Requires="p14">
             <p:contentPart p14:bwMode="auto" r:id="rId244">
               <p14:nvContentPartPr>
                 <p14:cNvPr id="153" name="墨迹 152">
@@ -35049,7 +35049,7 @@
               </p14:xfrm>
             </p:contentPart>
           </mc:Choice>
-          <mc:Fallback>
+          <mc:Fallback xmlns="">
             <p:pic>
               <p:nvPicPr>
                 <p:cNvPr id="153" name="墨迹 152">
